--- a/skills/thesis-defense-pptx/templates/HRBCU-defense-template.pptx
+++ b/skills/thesis-defense-pptx/templates/HRBCU-defense-template.pptx
@@ -31,7 +31,7 @@
     <p:sldId id="288" r:id="rId22"/>
     <p:sldId id="279" r:id="rId23"/>
   </p:sldIdLst>
-  <p:sldSz cx="12191695" cy="6858000"/>
+  <p:sldSz cx="12192000" cy="6858000"/>
   <p:notesSz cx="6858000" cy="9144000"/>
   <p:custDataLst>
     <p:tags r:id="rId25"/>
@@ -161,1123 +161,6 @@
 </p:cmAuthorLst>
 </file>
 
-<file path=ppt/charts/chart1.xml><?xml version="1.0" encoding="utf-8"?>
-<c:chartSpace xmlns:c="http://schemas.openxmlformats.org/drawingml/2006/chart" xmlns:a="http://schemas.openxmlformats.org/drawingml/2006/main" xmlns:r="http://schemas.openxmlformats.org/officeDocument/2006/relationships" xmlns:c16r2="http://schemas.microsoft.com/office/drawing/2015/06/chart">
-  <c:date1904 val="0"/>
-  <c:lang val="zh-CN"/>
-  <c:roundedCorners val="0"/>
-  <mc:AlternateContent xmlns:mc="http://schemas.openxmlformats.org/markup-compatibility/2006">
-    <mc:Choice xmlns:c14="http://schemas.microsoft.com/office/drawing/2007/8/2/chart" Requires="c14">
-      <c14:style val="102"/>
-    </mc:Choice>
-    <mc:Fallback>
-      <c:style val="2"/>
-    </mc:Fallback>
-  </mc:AlternateContent>
-  <c:chart>
-    <c:autoTitleDeleted val="1"/>
-    <c:plotArea>
-      <c:layout/>
-      <c:barChart>
-        <c:barDir val="col"/>
-        <c:grouping val="clustered"/>
-        <c:varyColors val="0"/>
-        <c:ser>
-          <c:idx val="0"/>
-          <c:order val="0"/>
-          <c:tx>
-            <c:strRef>
-              <c:f>Sheet1!$G$6</c:f>
-              <c:strCache>
-                <c:ptCount val="1"/>
-                <c:pt idx="0">
-                  <c:v>RNN</c:v>
-                </c:pt>
-              </c:strCache>
-            </c:strRef>
-          </c:tx>
-          <c:spPr>
-            <a:pattFill prst="ltVert">
-              <a:fgClr>
-                <a:schemeClr val="tx1"/>
-              </a:fgClr>
-              <a:bgClr>
-                <a:schemeClr val="bg1"/>
-              </a:bgClr>
-            </a:pattFill>
-            <a:ln>
-              <a:solidFill>
-                <a:sysClr val="windowText" lastClr="000000"/>
-              </a:solidFill>
-            </a:ln>
-            <a:effectLst/>
-          </c:spPr>
-          <c:invertIfNegative val="0"/>
-          <c:dLbls>
-            <c:spPr>
-              <a:noFill/>
-              <a:ln>
-                <a:noFill/>
-              </a:ln>
-              <a:effectLst/>
-            </c:spPr>
-            <c:txPr>
-              <a:bodyPr rot="0" spcFirstLastPara="1" vertOverflow="ellipsis" vert="horz" wrap="square" lIns="38100" tIns="19050" rIns="38100" bIns="19050" anchor="ctr" anchorCtr="1">
-                <a:spAutoFit/>
-              </a:bodyPr>
-              <a:lstStyle/>
-              <a:p>
-                <a:pPr>
-                  <a:defRPr sz="900" b="0" i="0" u="none" strike="noStrike" kern="1200" baseline="0">
-                    <a:solidFill>
-                      <a:schemeClr val="tx1">
-                        <a:lumMod val="75000"/>
-                        <a:lumOff val="25000"/>
-                      </a:schemeClr>
-                    </a:solidFill>
-                    <a:latin typeface="Times New Roman" panose="02020603050405020304" pitchFamily="18" charset="0"/>
-                    <a:ea typeface="+mn-ea"/>
-                    <a:cs typeface="Times New Roman" panose="02020603050405020304" pitchFamily="18" charset="0"/>
-                  </a:defRPr>
-                </a:pPr>
-                <a:endParaRPr lang="zh-CN"/>
-              </a:p>
-            </c:txPr>
-            <c:dLblPos val="outEnd"/>
-            <c:showLegendKey val="0"/>
-            <c:showVal val="1"/>
-            <c:showCatName val="0"/>
-            <c:showSerName val="0"/>
-            <c:showPercent val="0"/>
-            <c:showBubbleSize val="0"/>
-            <c:showLeaderLines val="0"/>
-            <c:extLst>
-              <c:ext xmlns:c15="http://schemas.microsoft.com/office/drawing/2012/chart" uri="{CE6537A1-D6FC-4f65-9D91-7224C49458BB}">
-                <c15:showLeaderLines val="1"/>
-                <c15:leaderLines>
-                  <c:spPr>
-                    <a:ln w="9525" cap="flat" cmpd="sng" algn="ctr">
-                      <a:solidFill>
-                        <a:schemeClr val="tx1">
-                          <a:lumMod val="35000"/>
-                          <a:lumOff val="65000"/>
-                        </a:schemeClr>
-                      </a:solidFill>
-                      <a:round/>
-                    </a:ln>
-                    <a:effectLst/>
-                  </c:spPr>
-                </c15:leaderLines>
-              </c:ext>
-            </c:extLst>
-          </c:dLbls>
-          <c:cat>
-            <c:strRef>
-              <c:f>Sheet1!$C$6:$D$6</c:f>
-              <c:strCache>
-                <c:ptCount val="2"/>
-                <c:pt idx="0">
-                  <c:v>模型参数量（百万）</c:v>
-                </c:pt>
-                <c:pt idx="1">
-                  <c:v>F1值（%）</c:v>
-                </c:pt>
-              </c:strCache>
-            </c:strRef>
-          </c:cat>
-          <c:val>
-            <c:numRef>
-              <c:f>Sheet1!$G$7:$G$8</c:f>
-              <c:numCache>
-                <c:formatCode>General</c:formatCode>
-                <c:ptCount val="2"/>
-                <c:pt idx="0">
-                  <c:v>107.42</c:v>
-                </c:pt>
-                <c:pt idx="1">
-                  <c:v>70.55</c:v>
-                </c:pt>
-              </c:numCache>
-            </c:numRef>
-          </c:val>
-          <c:extLst>
-            <c:ext xmlns:c16="http://schemas.microsoft.com/office/drawing/2014/chart" uri="{C3380CC4-5D6E-409C-BE32-E72D297353CC}">
-              <c16:uniqueId val="{00000000-C6D4-4D92-8478-A3C88BE4B204}"/>
-            </c:ext>
-          </c:extLst>
-        </c:ser>
-        <c:ser>
-          <c:idx val="1"/>
-          <c:order val="1"/>
-          <c:tx>
-            <c:strRef>
-              <c:f>Sheet1!$H$6</c:f>
-              <c:strCache>
-                <c:ptCount val="1"/>
-                <c:pt idx="0">
-                  <c:v>BiGRU</c:v>
-                </c:pt>
-              </c:strCache>
-            </c:strRef>
-          </c:tx>
-          <c:spPr>
-            <a:pattFill prst="wdUpDiag">
-              <a:fgClr>
-                <a:schemeClr val="tx1"/>
-              </a:fgClr>
-              <a:bgClr>
-                <a:schemeClr val="bg1"/>
-              </a:bgClr>
-            </a:pattFill>
-            <a:ln>
-              <a:solidFill>
-                <a:sysClr val="windowText" lastClr="000000"/>
-              </a:solidFill>
-            </a:ln>
-            <a:effectLst/>
-          </c:spPr>
-          <c:invertIfNegative val="0"/>
-          <c:dLbls>
-            <c:spPr>
-              <a:noFill/>
-              <a:ln>
-                <a:noFill/>
-              </a:ln>
-              <a:effectLst/>
-            </c:spPr>
-            <c:txPr>
-              <a:bodyPr rot="0" spcFirstLastPara="1" vertOverflow="ellipsis" vert="horz" wrap="square" lIns="38100" tIns="19050" rIns="38100" bIns="19050" anchor="ctr" anchorCtr="1">
-                <a:spAutoFit/>
-              </a:bodyPr>
-              <a:lstStyle/>
-              <a:p>
-                <a:pPr>
-                  <a:defRPr sz="900" b="0" i="0" u="none" strike="noStrike" kern="1200" baseline="0">
-                    <a:solidFill>
-                      <a:schemeClr val="tx1">
-                        <a:lumMod val="75000"/>
-                        <a:lumOff val="25000"/>
-                      </a:schemeClr>
-                    </a:solidFill>
-                    <a:latin typeface="Times New Roman" panose="02020603050405020304" pitchFamily="18" charset="0"/>
-                    <a:ea typeface="+mn-ea"/>
-                    <a:cs typeface="Times New Roman" panose="02020603050405020304" pitchFamily="18" charset="0"/>
-                  </a:defRPr>
-                </a:pPr>
-                <a:endParaRPr lang="zh-CN"/>
-              </a:p>
-            </c:txPr>
-            <c:dLblPos val="outEnd"/>
-            <c:showLegendKey val="0"/>
-            <c:showVal val="1"/>
-            <c:showCatName val="0"/>
-            <c:showSerName val="0"/>
-            <c:showPercent val="0"/>
-            <c:showBubbleSize val="0"/>
-            <c:showLeaderLines val="0"/>
-            <c:extLst>
-              <c:ext xmlns:c15="http://schemas.microsoft.com/office/drawing/2012/chart" uri="{CE6537A1-D6FC-4f65-9D91-7224C49458BB}">
-                <c15:showLeaderLines val="1"/>
-                <c15:leaderLines>
-                  <c:spPr>
-                    <a:ln w="9525" cap="flat" cmpd="sng" algn="ctr">
-                      <a:solidFill>
-                        <a:schemeClr val="tx1">
-                          <a:lumMod val="35000"/>
-                          <a:lumOff val="65000"/>
-                        </a:schemeClr>
-                      </a:solidFill>
-                      <a:round/>
-                    </a:ln>
-                    <a:effectLst/>
-                  </c:spPr>
-                </c15:leaderLines>
-              </c:ext>
-            </c:extLst>
-          </c:dLbls>
-          <c:cat>
-            <c:strRef>
-              <c:f>Sheet1!$C$6:$D$6</c:f>
-              <c:strCache>
-                <c:ptCount val="2"/>
-                <c:pt idx="0">
-                  <c:v>模型参数量（百万）</c:v>
-                </c:pt>
-                <c:pt idx="1">
-                  <c:v>F1值（%）</c:v>
-                </c:pt>
-              </c:strCache>
-            </c:strRef>
-          </c:cat>
-          <c:val>
-            <c:numRef>
-              <c:f>Sheet1!$H$7:$H$8</c:f>
-              <c:numCache>
-                <c:formatCode>General</c:formatCode>
-                <c:ptCount val="2"/>
-                <c:pt idx="0">
-                  <c:v>109.11</c:v>
-                </c:pt>
-                <c:pt idx="1">
-                  <c:v>72.680000000000007</c:v>
-                </c:pt>
-              </c:numCache>
-            </c:numRef>
-          </c:val>
-          <c:extLst>
-            <c:ext xmlns:c16="http://schemas.microsoft.com/office/drawing/2014/chart" uri="{C3380CC4-5D6E-409C-BE32-E72D297353CC}">
-              <c16:uniqueId val="{00000001-C6D4-4D92-8478-A3C88BE4B204}"/>
-            </c:ext>
-          </c:extLst>
-        </c:ser>
-        <c:ser>
-          <c:idx val="2"/>
-          <c:order val="2"/>
-          <c:tx>
-            <c:strRef>
-              <c:f>Sheet1!$I$6</c:f>
-              <c:strCache>
-                <c:ptCount val="1"/>
-                <c:pt idx="0">
-                  <c:v>BiLSTM</c:v>
-                </c:pt>
-              </c:strCache>
-            </c:strRef>
-          </c:tx>
-          <c:spPr>
-            <a:solidFill>
-              <a:schemeClr val="bg1"/>
-            </a:solidFill>
-            <a:ln>
-              <a:solidFill>
-                <a:sysClr val="windowText" lastClr="000000"/>
-              </a:solidFill>
-            </a:ln>
-            <a:effectLst/>
-          </c:spPr>
-          <c:invertIfNegative val="0"/>
-          <c:dLbls>
-            <c:spPr>
-              <a:noFill/>
-              <a:ln>
-                <a:noFill/>
-              </a:ln>
-              <a:effectLst/>
-            </c:spPr>
-            <c:txPr>
-              <a:bodyPr rot="0" spcFirstLastPara="1" vertOverflow="ellipsis" vert="horz" wrap="square" lIns="38100" tIns="19050" rIns="38100" bIns="19050" anchor="ctr" anchorCtr="1">
-                <a:spAutoFit/>
-              </a:bodyPr>
-              <a:lstStyle/>
-              <a:p>
-                <a:pPr>
-                  <a:defRPr sz="900" b="0" i="0" u="none" strike="noStrike" kern="1200" baseline="0">
-                    <a:solidFill>
-                      <a:schemeClr val="tx1">
-                        <a:lumMod val="75000"/>
-                        <a:lumOff val="25000"/>
-                      </a:schemeClr>
-                    </a:solidFill>
-                    <a:latin typeface="Times New Roman" panose="02020603050405020304" pitchFamily="18" charset="0"/>
-                    <a:ea typeface="+mn-ea"/>
-                    <a:cs typeface="Times New Roman" panose="02020603050405020304" pitchFamily="18" charset="0"/>
-                  </a:defRPr>
-                </a:pPr>
-                <a:endParaRPr lang="zh-CN"/>
-              </a:p>
-            </c:txPr>
-            <c:dLblPos val="outEnd"/>
-            <c:showLegendKey val="0"/>
-            <c:showVal val="1"/>
-            <c:showCatName val="0"/>
-            <c:showSerName val="0"/>
-            <c:showPercent val="0"/>
-            <c:showBubbleSize val="0"/>
-            <c:showLeaderLines val="0"/>
-            <c:extLst>
-              <c:ext xmlns:c15="http://schemas.microsoft.com/office/drawing/2012/chart" uri="{CE6537A1-D6FC-4f65-9D91-7224C49458BB}">
-                <c15:showLeaderLines val="1"/>
-                <c15:leaderLines>
-                  <c:spPr>
-                    <a:ln w="9525" cap="flat" cmpd="sng" algn="ctr">
-                      <a:solidFill>
-                        <a:schemeClr val="tx1">
-                          <a:lumMod val="35000"/>
-                          <a:lumOff val="65000"/>
-                        </a:schemeClr>
-                      </a:solidFill>
-                      <a:round/>
-                    </a:ln>
-                    <a:effectLst/>
-                  </c:spPr>
-                </c15:leaderLines>
-              </c:ext>
-            </c:extLst>
-          </c:dLbls>
-          <c:cat>
-            <c:strRef>
-              <c:f>Sheet1!$C$6:$D$6</c:f>
-              <c:strCache>
-                <c:ptCount val="2"/>
-                <c:pt idx="0">
-                  <c:v>模型参数量（百万）</c:v>
-                </c:pt>
-                <c:pt idx="1">
-                  <c:v>F1值（%）</c:v>
-                </c:pt>
-              </c:strCache>
-            </c:strRef>
-          </c:cat>
-          <c:val>
-            <c:numRef>
-              <c:f>Sheet1!$I$7:$I$8</c:f>
-              <c:numCache>
-                <c:formatCode>General</c:formatCode>
-                <c:ptCount val="2"/>
-                <c:pt idx="0">
-                  <c:v>109.96</c:v>
-                </c:pt>
-                <c:pt idx="1">
-                  <c:v>72.03</c:v>
-                </c:pt>
-              </c:numCache>
-            </c:numRef>
-          </c:val>
-          <c:extLst>
-            <c:ext xmlns:c16="http://schemas.microsoft.com/office/drawing/2014/chart" uri="{C3380CC4-5D6E-409C-BE32-E72D297353CC}">
-              <c16:uniqueId val="{00000002-C6D4-4D92-8478-A3C88BE4B204}"/>
-            </c:ext>
-          </c:extLst>
-        </c:ser>
-        <c:dLbls>
-          <c:dLblPos val="outEnd"/>
-          <c:showLegendKey val="0"/>
-          <c:showVal val="1"/>
-          <c:showCatName val="0"/>
-          <c:showSerName val="0"/>
-          <c:showPercent val="0"/>
-          <c:showBubbleSize val="0"/>
-        </c:dLbls>
-        <c:gapWidth val="219"/>
-        <c:overlap val="-27"/>
-        <c:axId val="455904920"/>
-        <c:axId val="455899880"/>
-      </c:barChart>
-      <c:catAx>
-        <c:axId val="455904920"/>
-        <c:scaling>
-          <c:orientation val="minMax"/>
-        </c:scaling>
-        <c:delete val="0"/>
-        <c:axPos val="b"/>
-        <c:numFmt formatCode="General" sourceLinked="1"/>
-        <c:majorTickMark val="none"/>
-        <c:minorTickMark val="none"/>
-        <c:tickLblPos val="nextTo"/>
-        <c:spPr>
-          <a:noFill/>
-          <a:ln w="6350" cap="flat" cmpd="sng" algn="ctr">
-            <a:solidFill>
-              <a:schemeClr val="dk1"/>
-            </a:solidFill>
-            <a:prstDash val="solid"/>
-            <a:miter lim="800000"/>
-          </a:ln>
-          <a:effectLst/>
-        </c:spPr>
-        <c:txPr>
-          <a:bodyPr rot="-60000000" spcFirstLastPara="1" vertOverflow="ellipsis" vert="horz" wrap="square" anchor="ctr" anchorCtr="1"/>
-          <a:lstStyle/>
-          <a:p>
-            <a:pPr>
-              <a:defRPr sz="900" b="0" i="0" u="none" strike="noStrike" kern="1200" baseline="0">
-                <a:solidFill>
-                  <a:schemeClr val="tx1"/>
-                </a:solidFill>
-                <a:latin typeface="Times New Roman" panose="02020603050405020304" pitchFamily="18" charset="0"/>
-                <a:ea typeface="宋体" panose="02010600030101010101" pitchFamily="2" charset="-122"/>
-                <a:cs typeface="Times New Roman" panose="02020603050405020304" pitchFamily="18" charset="0"/>
-              </a:defRPr>
-            </a:pPr>
-            <a:endParaRPr lang="zh-CN"/>
-          </a:p>
-        </c:txPr>
-        <c:crossAx val="455899880"/>
-        <c:crosses val="autoZero"/>
-        <c:auto val="1"/>
-        <c:lblAlgn val="ctr"/>
-        <c:lblOffset val="100"/>
-        <c:noMultiLvlLbl val="0"/>
-      </c:catAx>
-      <c:valAx>
-        <c:axId val="455899880"/>
-        <c:scaling>
-          <c:orientation val="minMax"/>
-        </c:scaling>
-        <c:delete val="0"/>
-        <c:axPos val="l"/>
-        <c:numFmt formatCode="General" sourceLinked="1"/>
-        <c:majorTickMark val="none"/>
-        <c:minorTickMark val="none"/>
-        <c:tickLblPos val="nextTo"/>
-        <c:spPr>
-          <a:noFill/>
-          <a:ln w="6350" cap="flat" cmpd="sng" algn="ctr">
-            <a:solidFill>
-              <a:schemeClr val="dk1"/>
-            </a:solidFill>
-            <a:prstDash val="solid"/>
-            <a:miter lim="800000"/>
-          </a:ln>
-          <a:effectLst/>
-        </c:spPr>
-        <c:txPr>
-          <a:bodyPr rot="-60000000" spcFirstLastPara="1" vertOverflow="ellipsis" vert="horz" wrap="square" anchor="ctr" anchorCtr="1"/>
-          <a:lstStyle/>
-          <a:p>
-            <a:pPr>
-              <a:defRPr sz="900" b="0" i="0" u="none" strike="noStrike" kern="1200" baseline="0">
-                <a:solidFill>
-                  <a:schemeClr val="tx1"/>
-                </a:solidFill>
-                <a:latin typeface="Times New Roman" panose="02020603050405020304" pitchFamily="18" charset="0"/>
-                <a:ea typeface="+mn-ea"/>
-                <a:cs typeface="Times New Roman" panose="02020603050405020304" pitchFamily="18" charset="0"/>
-              </a:defRPr>
-            </a:pPr>
-            <a:endParaRPr lang="zh-CN"/>
-          </a:p>
-        </c:txPr>
-        <c:crossAx val="455904920"/>
-        <c:crosses val="autoZero"/>
-        <c:crossBetween val="between"/>
-      </c:valAx>
-      <c:spPr>
-        <a:noFill/>
-        <a:ln>
-          <a:solidFill>
-            <a:schemeClr val="bg1"/>
-          </a:solidFill>
-        </a:ln>
-        <a:effectLst/>
-      </c:spPr>
-    </c:plotArea>
-    <c:legend>
-      <c:legendPos val="r"/>
-      <c:layout>
-        <c:manualLayout>
-          <c:xMode val="edge"/>
-          <c:yMode val="edge"/>
-          <c:x val="0.8282034120734908"/>
-          <c:y val="5.8737605715952171E-2"/>
-          <c:w val="0.13179809543710586"/>
-          <c:h val="0.2192510925013493"/>
-        </c:manualLayout>
-      </c:layout>
-      <c:overlay val="0"/>
-      <c:spPr>
-        <a:noFill/>
-        <a:ln>
-          <a:noFill/>
-        </a:ln>
-        <a:effectLst/>
-      </c:spPr>
-      <c:txPr>
-        <a:bodyPr rot="0" spcFirstLastPara="1" vertOverflow="ellipsis" vert="horz" wrap="square" anchor="ctr" anchorCtr="1"/>
-        <a:lstStyle/>
-        <a:p>
-          <a:pPr>
-            <a:defRPr sz="900" b="0" i="0" u="none" strike="noStrike" kern="1200" baseline="0">
-              <a:solidFill>
-                <a:schemeClr val="tx1">
-                  <a:lumMod val="65000"/>
-                  <a:lumOff val="35000"/>
-                </a:schemeClr>
-              </a:solidFill>
-              <a:latin typeface="Times New Roman" panose="02020603050405020304" pitchFamily="18" charset="0"/>
-              <a:ea typeface="+mn-ea"/>
-              <a:cs typeface="Times New Roman" panose="02020603050405020304" pitchFamily="18" charset="0"/>
-            </a:defRPr>
-          </a:pPr>
-          <a:endParaRPr lang="zh-CN"/>
-        </a:p>
-      </c:txPr>
-    </c:legend>
-    <c:plotVisOnly val="1"/>
-    <c:dispBlanksAs val="gap"/>
-    <c:showDLblsOverMax val="0"/>
-  </c:chart>
-  <c:spPr>
-    <a:solidFill>
-      <a:schemeClr val="bg1"/>
-    </a:solidFill>
-    <a:ln w="9525" cap="flat" cmpd="sng" algn="ctr">
-      <a:solidFill>
-        <a:sysClr val="windowText" lastClr="000000"/>
-      </a:solidFill>
-      <a:round/>
-    </a:ln>
-    <a:effectLst/>
-  </c:spPr>
-  <c:txPr>
-    <a:bodyPr/>
-    <a:lstStyle/>
-    <a:p>
-      <a:pPr>
-        <a:defRPr/>
-      </a:pPr>
-      <a:endParaRPr lang="zh-CN"/>
-    </a:p>
-  </c:txPr>
-  <c:externalData r:id="rId3">
-    <c:autoUpdate val="0"/>
-  </c:externalData>
-</c:chartSpace>
-</file>
-
-<file path=ppt/charts/colors1.xml><?xml version="1.0" encoding="utf-8"?>
-<cs:colorStyle xmlns:cs="http://schemas.microsoft.com/office/drawing/2012/chartStyle" xmlns:a="http://schemas.openxmlformats.org/drawingml/2006/main" meth="cycle" id="10">
-  <a:schemeClr val="accent1"/>
-  <a:schemeClr val="accent2"/>
-  <a:schemeClr val="accent3"/>
-  <a:schemeClr val="accent4"/>
-  <a:schemeClr val="accent5"/>
-  <a:schemeClr val="accent6"/>
-  <cs:variation/>
-  <cs:variation>
-    <a:lumMod val="60000"/>
-  </cs:variation>
-  <cs:variation>
-    <a:lumMod val="80000"/>
-    <a:lumOff val="20000"/>
-  </cs:variation>
-  <cs:variation>
-    <a:lumMod val="80000"/>
-  </cs:variation>
-  <cs:variation>
-    <a:lumMod val="60000"/>
-    <a:lumOff val="40000"/>
-  </cs:variation>
-  <cs:variation>
-    <a:lumMod val="50000"/>
-  </cs:variation>
-  <cs:variation>
-    <a:lumMod val="70000"/>
-    <a:lumOff val="30000"/>
-  </cs:variation>
-  <cs:variation>
-    <a:lumMod val="70000"/>
-  </cs:variation>
-  <cs:variation>
-    <a:lumMod val="50000"/>
-    <a:lumOff val="50000"/>
-  </cs:variation>
-</cs:colorStyle>
-</file>
-
-<file path=ppt/charts/style1.xml><?xml version="1.0" encoding="utf-8"?>
-<cs:chartStyle xmlns:cs="http://schemas.microsoft.com/office/drawing/2012/chartStyle" xmlns:a="http://schemas.openxmlformats.org/drawingml/2006/main" id="201">
-  <cs:axisTitle>
-    <cs:lnRef idx="0"/>
-    <cs:fillRef idx="0"/>
-    <cs:effectRef idx="0"/>
-    <cs:fontRef idx="minor">
-      <a:schemeClr val="tx1">
-        <a:lumMod val="65000"/>
-        <a:lumOff val="35000"/>
-      </a:schemeClr>
-    </cs:fontRef>
-    <cs:defRPr sz="1000" kern="1200"/>
-  </cs:axisTitle>
-  <cs:categoryAxis>
-    <cs:lnRef idx="0"/>
-    <cs:fillRef idx="0"/>
-    <cs:effectRef idx="0"/>
-    <cs:fontRef idx="minor">
-      <a:schemeClr val="tx1">
-        <a:lumMod val="65000"/>
-        <a:lumOff val="35000"/>
-      </a:schemeClr>
-    </cs:fontRef>
-    <cs:spPr>
-      <a:ln w="9525" cap="flat" cmpd="sng" algn="ctr">
-        <a:solidFill>
-          <a:schemeClr val="tx1">
-            <a:lumMod val="15000"/>
-            <a:lumOff val="85000"/>
-          </a:schemeClr>
-        </a:solidFill>
-        <a:round/>
-      </a:ln>
-    </cs:spPr>
-    <cs:defRPr sz="900" kern="1200"/>
-  </cs:categoryAxis>
-  <cs:chartArea mods="allowNoFillOverride allowNoLineOverride">
-    <cs:lnRef idx="0"/>
-    <cs:fillRef idx="0"/>
-    <cs:effectRef idx="0"/>
-    <cs:fontRef idx="minor">
-      <a:schemeClr val="tx1"/>
-    </cs:fontRef>
-    <cs:spPr>
-      <a:solidFill>
-        <a:schemeClr val="bg1"/>
-      </a:solidFill>
-      <a:ln w="9525" cap="flat" cmpd="sng" algn="ctr">
-        <a:solidFill>
-          <a:schemeClr val="tx1">
-            <a:lumMod val="15000"/>
-            <a:lumOff val="85000"/>
-          </a:schemeClr>
-        </a:solidFill>
-        <a:round/>
-      </a:ln>
-    </cs:spPr>
-    <cs:defRPr sz="1000" kern="1200"/>
-  </cs:chartArea>
-  <cs:dataLabel>
-    <cs:lnRef idx="0"/>
-    <cs:fillRef idx="0"/>
-    <cs:effectRef idx="0"/>
-    <cs:fontRef idx="minor">
-      <a:schemeClr val="tx1">
-        <a:lumMod val="75000"/>
-        <a:lumOff val="25000"/>
-      </a:schemeClr>
-    </cs:fontRef>
-    <cs:defRPr sz="900" kern="1200"/>
-  </cs:dataLabel>
-  <cs:dataLabelCallout>
-    <cs:lnRef idx="0"/>
-    <cs:fillRef idx="0"/>
-    <cs:effectRef idx="0"/>
-    <cs:fontRef idx="minor">
-      <a:schemeClr val="dk1">
-        <a:lumMod val="65000"/>
-        <a:lumOff val="35000"/>
-      </a:schemeClr>
-    </cs:fontRef>
-    <cs:spPr>
-      <a:solidFill>
-        <a:schemeClr val="lt1"/>
-      </a:solidFill>
-      <a:ln>
-        <a:solidFill>
-          <a:schemeClr val="dk1">
-            <a:lumMod val="25000"/>
-            <a:lumOff val="75000"/>
-          </a:schemeClr>
-        </a:solidFill>
-      </a:ln>
-    </cs:spPr>
-    <cs:defRPr sz="900" kern="1200"/>
-    <cs:bodyPr rot="0" spcFirstLastPara="1" vertOverflow="clip" horzOverflow="clip" vert="horz" wrap="square" lIns="36576" tIns="18288" rIns="36576" bIns="18288" anchor="ctr" anchorCtr="1">
-      <a:spAutoFit/>
-    </cs:bodyPr>
-  </cs:dataLabelCallout>
-  <cs:dataPoint>
-    <cs:lnRef idx="0"/>
-    <cs:fillRef idx="1">
-      <cs:styleClr val="auto"/>
-    </cs:fillRef>
-    <cs:effectRef idx="0"/>
-    <cs:fontRef idx="minor">
-      <a:schemeClr val="tx1"/>
-    </cs:fontRef>
-  </cs:dataPoint>
-  <cs:dataPoint3D>
-    <cs:lnRef idx="0"/>
-    <cs:fillRef idx="1">
-      <cs:styleClr val="auto"/>
-    </cs:fillRef>
-    <cs:effectRef idx="0"/>
-    <cs:fontRef idx="minor">
-      <a:schemeClr val="tx1"/>
-    </cs:fontRef>
-  </cs:dataPoint3D>
-  <cs:dataPointLine>
-    <cs:lnRef idx="0">
-      <cs:styleClr val="auto"/>
-    </cs:lnRef>
-    <cs:fillRef idx="1"/>
-    <cs:effectRef idx="0"/>
-    <cs:fontRef idx="minor">
-      <a:schemeClr val="tx1"/>
-    </cs:fontRef>
-    <cs:spPr>
-      <a:ln w="28575" cap="rnd">
-        <a:solidFill>
-          <a:schemeClr val="phClr"/>
-        </a:solidFill>
-        <a:round/>
-      </a:ln>
-    </cs:spPr>
-  </cs:dataPointLine>
-  <cs:dataPointMarker>
-    <cs:lnRef idx="0">
-      <cs:styleClr val="auto"/>
-    </cs:lnRef>
-    <cs:fillRef idx="1">
-      <cs:styleClr val="auto"/>
-    </cs:fillRef>
-    <cs:effectRef idx="0"/>
-    <cs:fontRef idx="minor">
-      <a:schemeClr val="tx1"/>
-    </cs:fontRef>
-    <cs:spPr>
-      <a:ln w="9525">
-        <a:solidFill>
-          <a:schemeClr val="phClr"/>
-        </a:solidFill>
-      </a:ln>
-    </cs:spPr>
-  </cs:dataPointMarker>
-  <cs:dataPointMarkerLayout symbol="circle" size="5"/>
-  <cs:dataPointWireframe>
-    <cs:lnRef idx="0">
-      <cs:styleClr val="auto"/>
-    </cs:lnRef>
-    <cs:fillRef idx="1"/>
-    <cs:effectRef idx="0"/>
-    <cs:fontRef idx="minor">
-      <a:schemeClr val="tx1"/>
-    </cs:fontRef>
-    <cs:spPr>
-      <a:ln w="9525" cap="rnd">
-        <a:solidFill>
-          <a:schemeClr val="phClr"/>
-        </a:solidFill>
-        <a:round/>
-      </a:ln>
-    </cs:spPr>
-  </cs:dataPointWireframe>
-  <cs:dataTable>
-    <cs:lnRef idx="0"/>
-    <cs:fillRef idx="0"/>
-    <cs:effectRef idx="0"/>
-    <cs:fontRef idx="minor">
-      <a:schemeClr val="tx1">
-        <a:lumMod val="65000"/>
-        <a:lumOff val="35000"/>
-      </a:schemeClr>
-    </cs:fontRef>
-    <cs:spPr>
-      <a:noFill/>
-      <a:ln w="9525" cap="flat" cmpd="sng" algn="ctr">
-        <a:solidFill>
-          <a:schemeClr val="tx1">
-            <a:lumMod val="15000"/>
-            <a:lumOff val="85000"/>
-          </a:schemeClr>
-        </a:solidFill>
-        <a:round/>
-      </a:ln>
-    </cs:spPr>
-    <cs:defRPr sz="900" kern="1200"/>
-  </cs:dataTable>
-  <cs:downBar>
-    <cs:lnRef idx="0"/>
-    <cs:fillRef idx="0"/>
-    <cs:effectRef idx="0"/>
-    <cs:fontRef idx="minor">
-      <a:schemeClr val="dk1"/>
-    </cs:fontRef>
-    <cs:spPr>
-      <a:solidFill>
-        <a:schemeClr val="dk1">
-          <a:lumMod val="65000"/>
-          <a:lumOff val="35000"/>
-        </a:schemeClr>
-      </a:solidFill>
-      <a:ln w="9525">
-        <a:solidFill>
-          <a:schemeClr val="tx1">
-            <a:lumMod val="65000"/>
-            <a:lumOff val="35000"/>
-          </a:schemeClr>
-        </a:solidFill>
-      </a:ln>
-    </cs:spPr>
-  </cs:downBar>
-  <cs:dropLine>
-    <cs:lnRef idx="0"/>
-    <cs:fillRef idx="0"/>
-    <cs:effectRef idx="0"/>
-    <cs:fontRef idx="minor">
-      <a:schemeClr val="tx1"/>
-    </cs:fontRef>
-    <cs:spPr>
-      <a:ln w="9525" cap="flat" cmpd="sng" algn="ctr">
-        <a:solidFill>
-          <a:schemeClr val="tx1">
-            <a:lumMod val="35000"/>
-            <a:lumOff val="65000"/>
-          </a:schemeClr>
-        </a:solidFill>
-        <a:round/>
-      </a:ln>
-    </cs:spPr>
-  </cs:dropLine>
-  <cs:errorBar>
-    <cs:lnRef idx="0"/>
-    <cs:fillRef idx="0"/>
-    <cs:effectRef idx="0"/>
-    <cs:fontRef idx="minor">
-      <a:schemeClr val="tx1"/>
-    </cs:fontRef>
-    <cs:spPr>
-      <a:ln w="9525" cap="flat" cmpd="sng" algn="ctr">
-        <a:solidFill>
-          <a:schemeClr val="tx1">
-            <a:lumMod val="65000"/>
-            <a:lumOff val="35000"/>
-          </a:schemeClr>
-        </a:solidFill>
-        <a:round/>
-      </a:ln>
-    </cs:spPr>
-  </cs:errorBar>
-  <cs:floor>
-    <cs:lnRef idx="0"/>
-    <cs:fillRef idx="0"/>
-    <cs:effectRef idx="0"/>
-    <cs:fontRef idx="minor">
-      <a:schemeClr val="tx1"/>
-    </cs:fontRef>
-    <cs:spPr>
-      <a:noFill/>
-      <a:ln>
-        <a:noFill/>
-      </a:ln>
-    </cs:spPr>
-  </cs:floor>
-  <cs:gridlineMajor>
-    <cs:lnRef idx="0"/>
-    <cs:fillRef idx="0"/>
-    <cs:effectRef idx="0"/>
-    <cs:fontRef idx="minor">
-      <a:schemeClr val="tx1"/>
-    </cs:fontRef>
-    <cs:spPr>
-      <a:ln w="9525" cap="flat" cmpd="sng" algn="ctr">
-        <a:solidFill>
-          <a:schemeClr val="tx1">
-            <a:lumMod val="15000"/>
-            <a:lumOff val="85000"/>
-          </a:schemeClr>
-        </a:solidFill>
-        <a:round/>
-      </a:ln>
-    </cs:spPr>
-  </cs:gridlineMajor>
-  <cs:gridlineMinor>
-    <cs:lnRef idx="0"/>
-    <cs:fillRef idx="0"/>
-    <cs:effectRef idx="0"/>
-    <cs:fontRef idx="minor">
-      <a:schemeClr val="tx1"/>
-    </cs:fontRef>
-    <cs:spPr>
-      <a:ln w="9525" cap="flat" cmpd="sng" algn="ctr">
-        <a:solidFill>
-          <a:schemeClr val="tx1">
-            <a:lumMod val="5000"/>
-            <a:lumOff val="95000"/>
-          </a:schemeClr>
-        </a:solidFill>
-        <a:round/>
-      </a:ln>
-    </cs:spPr>
-  </cs:gridlineMinor>
-  <cs:hiLoLine>
-    <cs:lnRef idx="0"/>
-    <cs:fillRef idx="0"/>
-    <cs:effectRef idx="0"/>
-    <cs:fontRef idx="minor">
-      <a:schemeClr val="tx1"/>
-    </cs:fontRef>
-    <cs:spPr>
-      <a:ln w="9525" cap="flat" cmpd="sng" algn="ctr">
-        <a:solidFill>
-          <a:schemeClr val="tx1">
-            <a:lumMod val="75000"/>
-            <a:lumOff val="25000"/>
-          </a:schemeClr>
-        </a:solidFill>
-        <a:round/>
-      </a:ln>
-    </cs:spPr>
-  </cs:hiLoLine>
-  <cs:leaderLine>
-    <cs:lnRef idx="0"/>
-    <cs:fillRef idx="0"/>
-    <cs:effectRef idx="0"/>
-    <cs:fontRef idx="minor">
-      <a:schemeClr val="tx1"/>
-    </cs:fontRef>
-    <cs:spPr>
-      <a:ln w="9525" cap="flat" cmpd="sng" algn="ctr">
-        <a:solidFill>
-          <a:schemeClr val="tx1">
-            <a:lumMod val="35000"/>
-            <a:lumOff val="65000"/>
-          </a:schemeClr>
-        </a:solidFill>
-        <a:round/>
-      </a:ln>
-    </cs:spPr>
-  </cs:leaderLine>
-  <cs:legend>
-    <cs:lnRef idx="0"/>
-    <cs:fillRef idx="0"/>
-    <cs:effectRef idx="0"/>
-    <cs:fontRef idx="minor">
-      <a:schemeClr val="tx1">
-        <a:lumMod val="65000"/>
-        <a:lumOff val="35000"/>
-      </a:schemeClr>
-    </cs:fontRef>
-    <cs:defRPr sz="900" kern="1200"/>
-  </cs:legend>
-  <cs:plotArea mods="allowNoFillOverride allowNoLineOverride">
-    <cs:lnRef idx="0"/>
-    <cs:fillRef idx="0"/>
-    <cs:effectRef idx="0"/>
-    <cs:fontRef idx="minor">
-      <a:schemeClr val="tx1"/>
-    </cs:fontRef>
-  </cs:plotArea>
-  <cs:plotArea3D mods="allowNoFillOverride allowNoLineOverride">
-    <cs:lnRef idx="0"/>
-    <cs:fillRef idx="0"/>
-    <cs:effectRef idx="0"/>
-    <cs:fontRef idx="minor">
-      <a:schemeClr val="tx1"/>
-    </cs:fontRef>
-  </cs:plotArea3D>
-  <cs:seriesAxis>
-    <cs:lnRef idx="0"/>
-    <cs:fillRef idx="0"/>
-    <cs:effectRef idx="0"/>
-    <cs:fontRef idx="minor">
-      <a:schemeClr val="tx1">
-        <a:lumMod val="65000"/>
-        <a:lumOff val="35000"/>
-      </a:schemeClr>
-    </cs:fontRef>
-    <cs:defRPr sz="900" kern="1200"/>
-  </cs:seriesAxis>
-  <cs:seriesLine>
-    <cs:lnRef idx="0"/>
-    <cs:fillRef idx="0"/>
-    <cs:effectRef idx="0"/>
-    <cs:fontRef idx="minor">
-      <a:schemeClr val="tx1"/>
-    </cs:fontRef>
-    <cs:spPr>
-      <a:ln w="9525" cap="flat" cmpd="sng" algn="ctr">
-        <a:solidFill>
-          <a:schemeClr val="tx1">
-            <a:lumMod val="35000"/>
-            <a:lumOff val="65000"/>
-          </a:schemeClr>
-        </a:solidFill>
-        <a:round/>
-      </a:ln>
-    </cs:spPr>
-  </cs:seriesLine>
-  <cs:title>
-    <cs:lnRef idx="0"/>
-    <cs:fillRef idx="0"/>
-    <cs:effectRef idx="0"/>
-    <cs:fontRef idx="minor">
-      <a:schemeClr val="tx1">
-        <a:lumMod val="65000"/>
-        <a:lumOff val="35000"/>
-      </a:schemeClr>
-    </cs:fontRef>
-    <cs:defRPr sz="1400" b="0" kern="1200" spc="0" baseline="0"/>
-  </cs:title>
-  <cs:trendline>
-    <cs:lnRef idx="0">
-      <cs:styleClr val="auto"/>
-    </cs:lnRef>
-    <cs:fillRef idx="0"/>
-    <cs:effectRef idx="0"/>
-    <cs:fontRef idx="minor">
-      <a:schemeClr val="tx1"/>
-    </cs:fontRef>
-    <cs:spPr>
-      <a:ln w="19050" cap="rnd">
-        <a:solidFill>
-          <a:schemeClr val="phClr"/>
-        </a:solidFill>
-        <a:prstDash val="sysDot"/>
-      </a:ln>
-    </cs:spPr>
-  </cs:trendline>
-  <cs:trendlineLabel>
-    <cs:lnRef idx="0"/>
-    <cs:fillRef idx="0"/>
-    <cs:effectRef idx="0"/>
-    <cs:fontRef idx="minor">
-      <a:schemeClr val="tx1">
-        <a:lumMod val="65000"/>
-        <a:lumOff val="35000"/>
-      </a:schemeClr>
-    </cs:fontRef>
-    <cs:defRPr sz="900" kern="1200"/>
-  </cs:trendlineLabel>
-  <cs:upBar>
-    <cs:lnRef idx="0"/>
-    <cs:fillRef idx="0"/>
-    <cs:effectRef idx="0"/>
-    <cs:fontRef idx="minor">
-      <a:schemeClr val="dk1"/>
-    </cs:fontRef>
-    <cs:spPr>
-      <a:solidFill>
-        <a:schemeClr val="lt1"/>
-      </a:solidFill>
-      <a:ln w="9525">
-        <a:solidFill>
-          <a:schemeClr val="tx1">
-            <a:lumMod val="15000"/>
-            <a:lumOff val="85000"/>
-          </a:schemeClr>
-        </a:solidFill>
-      </a:ln>
-    </cs:spPr>
-  </cs:upBar>
-  <cs:valueAxis>
-    <cs:lnRef idx="0"/>
-    <cs:fillRef idx="0"/>
-    <cs:effectRef idx="0"/>
-    <cs:fontRef idx="minor">
-      <a:schemeClr val="tx1">
-        <a:lumMod val="65000"/>
-        <a:lumOff val="35000"/>
-      </a:schemeClr>
-    </cs:fontRef>
-    <cs:defRPr sz="900" kern="1200"/>
-  </cs:valueAxis>
-  <cs:wall>
-    <cs:lnRef idx="0"/>
-    <cs:fillRef idx="0"/>
-    <cs:effectRef idx="0"/>
-    <cs:fontRef idx="minor">
-      <a:schemeClr val="tx1"/>
-    </cs:fontRef>
-    <cs:spPr>
-      <a:noFill/>
-      <a:ln>
-        <a:noFill/>
-      </a:ln>
-    </cs:spPr>
-  </cs:wall>
-</cs:chartStyle>
-</file>
-
 <file path=ppt/notesMasters/notesMaster1.xml><?xml version="1.0" encoding="utf-8"?>
 <p:notesMaster xmlns:a="http://schemas.openxmlformats.org/drawingml/2006/main" xmlns:r="http://schemas.openxmlformats.org/officeDocument/2006/relationships" xmlns:p="http://schemas.openxmlformats.org/presentationml/2006/main">
   <p:cSld>
@@ -1360,7 +243,7 @@
           <a:p>
             <a:fld id="{D2A48B96-639E-45A3-A0BA-2464DFDB1FAA}" type="datetimeFigureOut">
               <a:rPr lang="zh-CN" altLang="en-US" smtClean="0"/>
-              <a:t>2024/5/24</a:t>
+              <a:t>2026/5/25</a:t>
             </a:fld>
             <a:endParaRPr lang="zh-CN" altLang="en-US"/>
           </a:p>
@@ -1666,142 +549,6 @@
           <a:bodyPr/>
           <a:lstStyle/>
           <a:p>
-            <a:r>
-              <a:rPr lang="zh-CN" altLang="en-US" sz="1200" kern="100" dirty="0">
-                <a:effectLst/>
-                <a:latin typeface="Times New Roman" panose="02020603050405020304" pitchFamily="18" charset="0"/>
-                <a:ea typeface="宋体" panose="02010600030101010101" pitchFamily="2" charset="-122"/>
-              </a:rPr>
-              <a:t> 在之前的一些研究中，大多单独使用词嵌入或者字符嵌入，没有考虑它们之间的互补能力，且只通过拼接的方法对字符特征和词特征进行融合，忽略了字词相互融合过程中的特征信息。基于此，本文提出了一种名为</a:t>
-            </a:r>
-            <a:r>
-              <a:rPr lang="en-US" altLang="zh-CN" sz="1200" kern="100" dirty="0">
-                <a:effectLst/>
-                <a:latin typeface="Times New Roman" panose="02020603050405020304" pitchFamily="18" charset="0"/>
-                <a:ea typeface="宋体" panose="02010600030101010101" pitchFamily="2" charset="-122"/>
-              </a:rPr>
-              <a:t>DCLM</a:t>
-            </a:r>
-            <a:r>
-              <a:rPr lang="zh-CN" altLang="en-US" sz="1200" kern="100" dirty="0">
-                <a:effectLst/>
-                <a:latin typeface="Times New Roman" panose="02020603050405020304" pitchFamily="18" charset="0"/>
-                <a:ea typeface="宋体" panose="02010600030101010101" pitchFamily="2" charset="-122"/>
-              </a:rPr>
-              <a:t>（</a:t>
-            </a:r>
-            <a:r>
-              <a:rPr lang="en-US" altLang="zh-CN" sz="1200" kern="100" dirty="0" err="1">
-                <a:effectLst/>
-                <a:latin typeface="Times New Roman" panose="02020603050405020304" pitchFamily="18" charset="0"/>
-                <a:ea typeface="宋体" panose="02010600030101010101" pitchFamily="2" charset="-122"/>
-              </a:rPr>
-              <a:t>BioDistilBERT-CharCNN+CharLSTM-BiLSTM-MHA</a:t>
-            </a:r>
-            <a:r>
-              <a:rPr lang="zh-CN" altLang="en-US" sz="1200" kern="100" dirty="0">
-                <a:effectLst/>
-                <a:latin typeface="Times New Roman" panose="02020603050405020304" pitchFamily="18" charset="0"/>
-                <a:ea typeface="宋体" panose="02010600030101010101" pitchFamily="2" charset="-122"/>
-              </a:rPr>
-              <a:t>）的多交叉注意力特征融合的模型。在词嵌入的基础上使用字符嵌入，词嵌入使用</a:t>
-            </a:r>
-            <a:r>
-              <a:rPr lang="en-US" altLang="zh-CN" sz="1200" kern="100" dirty="0" err="1">
-                <a:effectLst/>
-                <a:latin typeface="Times New Roman" panose="02020603050405020304" pitchFamily="18" charset="0"/>
-                <a:ea typeface="宋体" panose="02010600030101010101" pitchFamily="2" charset="-122"/>
-              </a:rPr>
-              <a:t>BioDistilBERT</a:t>
-            </a:r>
-            <a:r>
-              <a:rPr lang="zh-CN" altLang="en-US" sz="1200" kern="100" dirty="0">
-                <a:effectLst/>
-                <a:latin typeface="Times New Roman" panose="02020603050405020304" pitchFamily="18" charset="0"/>
-                <a:ea typeface="宋体" panose="02010600030101010101" pitchFamily="2" charset="-122"/>
-              </a:rPr>
-              <a:t>模型来提取，字符嵌入分别使用</a:t>
-            </a:r>
-            <a:r>
-              <a:rPr lang="en-US" altLang="zh-CN" sz="1200" kern="100" dirty="0" err="1">
-                <a:effectLst/>
-                <a:latin typeface="Times New Roman" panose="02020603050405020304" pitchFamily="18" charset="0"/>
-                <a:ea typeface="宋体" panose="02010600030101010101" pitchFamily="2" charset="-122"/>
-              </a:rPr>
-              <a:t>CharCNN</a:t>
-            </a:r>
-            <a:r>
-              <a:rPr lang="zh-CN" altLang="en-US" sz="1200" kern="100" dirty="0">
-                <a:effectLst/>
-                <a:latin typeface="Times New Roman" panose="02020603050405020304" pitchFamily="18" charset="0"/>
-                <a:ea typeface="宋体" panose="02010600030101010101" pitchFamily="2" charset="-122"/>
-              </a:rPr>
-              <a:t>和</a:t>
-            </a:r>
-            <a:r>
-              <a:rPr lang="en-US" altLang="zh-CN" sz="1200" kern="100" dirty="0" err="1">
-                <a:effectLst/>
-                <a:latin typeface="Times New Roman" panose="02020603050405020304" pitchFamily="18" charset="0"/>
-                <a:ea typeface="宋体" panose="02010600030101010101" pitchFamily="2" charset="-122"/>
-              </a:rPr>
-              <a:t>CharLSTM</a:t>
-            </a:r>
-            <a:r>
-              <a:rPr lang="zh-CN" altLang="en-US" sz="1200" kern="100" dirty="0">
-                <a:effectLst/>
-                <a:latin typeface="Times New Roman" panose="02020603050405020304" pitchFamily="18" charset="0"/>
-                <a:ea typeface="宋体" panose="02010600030101010101" pitchFamily="2" charset="-122"/>
-              </a:rPr>
-              <a:t>模型来提取，然后通过三个交叉注意力机制来融合字词特征。之后通过</a:t>
-            </a:r>
-            <a:r>
-              <a:rPr lang="en-US" altLang="zh-CN" sz="1200" kern="100" dirty="0" err="1">
-                <a:effectLst/>
-                <a:latin typeface="Times New Roman" panose="02020603050405020304" pitchFamily="18" charset="0"/>
-                <a:ea typeface="宋体" panose="02010600030101010101" pitchFamily="2" charset="-122"/>
-              </a:rPr>
-              <a:t>BiLSTM</a:t>
-            </a:r>
-            <a:r>
-              <a:rPr lang="zh-CN" altLang="en-US" sz="1200" kern="100" dirty="0">
-                <a:effectLst/>
-                <a:latin typeface="Times New Roman" panose="02020603050405020304" pitchFamily="18" charset="0"/>
-                <a:ea typeface="宋体" panose="02010600030101010101" pitchFamily="2" charset="-122"/>
-              </a:rPr>
-              <a:t>并引入多头注意力机制，其中，</a:t>
-            </a:r>
-            <a:r>
-              <a:rPr lang="en-US" altLang="zh-CN" sz="1200" kern="100" dirty="0" err="1">
-                <a:effectLst/>
-                <a:latin typeface="Times New Roman" panose="02020603050405020304" pitchFamily="18" charset="0"/>
-                <a:ea typeface="宋体" panose="02010600030101010101" pitchFamily="2" charset="-122"/>
-              </a:rPr>
-              <a:t>BiLSTM</a:t>
-            </a:r>
-            <a:r>
-              <a:rPr lang="zh-CN" altLang="en-US" sz="1200" kern="100" dirty="0">
-                <a:effectLst/>
-                <a:latin typeface="Times New Roman" panose="02020603050405020304" pitchFamily="18" charset="0"/>
-                <a:ea typeface="宋体" panose="02010600030101010101" pitchFamily="2" charset="-122"/>
-              </a:rPr>
-              <a:t>可以有效地捕捉文本中的上下文信息，而多头注意力机制则能够进一步关注到重要的语义特征，使模型能够捕捉到更多关于实体边界和类型的信息，从而提升实体识别的准确性。最后通过输出层输出最终结果。在模型训练过程中，引入</a:t>
-            </a:r>
-            <a:r>
-              <a:rPr lang="en-US" altLang="zh-CN" sz="1200" kern="100" dirty="0">
-                <a:effectLst/>
-                <a:latin typeface="Times New Roman" panose="02020603050405020304" pitchFamily="18" charset="0"/>
-                <a:ea typeface="宋体" panose="02010600030101010101" pitchFamily="2" charset="-122"/>
-              </a:rPr>
-              <a:t>Focal Loss</a:t>
-            </a:r>
-            <a:r>
-              <a:rPr lang="zh-CN" altLang="en-US" sz="1200" kern="100" dirty="0">
-                <a:effectLst/>
-                <a:latin typeface="Times New Roman" panose="02020603050405020304" pitchFamily="18" charset="0"/>
-                <a:ea typeface="宋体" panose="02010600030101010101" pitchFamily="2" charset="-122"/>
-              </a:rPr>
-              <a:t>和交叉熵损失函数联合对模型进行训练，缓解了数据不平衡问题。</a:t>
-            </a:r>
             <a:endParaRPr lang="zh-CN" altLang="en-US" dirty="0"/>
           </a:p>
         </p:txBody>
@@ -1886,558 +633,6 @@
           <a:bodyPr/>
           <a:lstStyle/>
           <a:p>
-            <a:pPr marL="0" marR="0" lvl="0" indent="0" algn="l" defTabSz="914400" rtl="0" eaLnBrk="1" fontAlgn="auto" latinLnBrk="0" hangingPunct="1">
-              <a:lnSpc>
-                <a:spcPct val="100000"/>
-              </a:lnSpc>
-              <a:spcBef>
-                <a:spcPts val="0"/>
-              </a:spcBef>
-              <a:spcAft>
-                <a:spcPts val="0"/>
-              </a:spcAft>
-              <a:buClrTx/>
-              <a:buSzTx/>
-              <a:buFontTx/>
-              <a:buNone/>
-              <a:tabLst/>
-              <a:defRPr/>
-            </a:pPr>
-            <a:r>
-              <a:rPr lang="zh-CN" altLang="zh-CN" sz="1800" kern="100" dirty="0">
-                <a:solidFill>
-                  <a:srgbClr val="000000"/>
-                </a:solidFill>
-                <a:effectLst/>
-                <a:latin typeface="Times New Roman" panose="02020603050405020304" pitchFamily="18" charset="0"/>
-                <a:ea typeface="宋体" panose="02010600030101010101" pitchFamily="2" charset="-122"/>
-              </a:rPr>
-              <a:t>方法</a:t>
-            </a:r>
-            <a:r>
-              <a:rPr lang="en-US" altLang="zh-CN" sz="1800" kern="100" dirty="0">
-                <a:solidFill>
-                  <a:srgbClr val="000000"/>
-                </a:solidFill>
-                <a:effectLst/>
-                <a:latin typeface="Times New Roman" panose="02020603050405020304" pitchFamily="18" charset="0"/>
-                <a:ea typeface="宋体" panose="02010600030101010101" pitchFamily="2" charset="-122"/>
-              </a:rPr>
-              <a:t>1</a:t>
-            </a:r>
-            <a:r>
-              <a:rPr lang="zh-CN" altLang="zh-CN" sz="1800" kern="100" dirty="0">
-                <a:solidFill>
-                  <a:srgbClr val="000000"/>
-                </a:solidFill>
-                <a:effectLst/>
-                <a:latin typeface="Times New Roman" panose="02020603050405020304" pitchFamily="18" charset="0"/>
-                <a:ea typeface="宋体" panose="02010600030101010101" pitchFamily="2" charset="-122"/>
-              </a:rPr>
-              <a:t>对特征提取层的三次融合都使用直接拼接的方法，方法</a:t>
-            </a:r>
-            <a:r>
-              <a:rPr lang="en-US" altLang="zh-CN" sz="1800" kern="100" dirty="0">
-                <a:solidFill>
-                  <a:srgbClr val="000000"/>
-                </a:solidFill>
-                <a:effectLst/>
-                <a:latin typeface="Times New Roman" panose="02020603050405020304" pitchFamily="18" charset="0"/>
-                <a:ea typeface="宋体" panose="02010600030101010101" pitchFamily="2" charset="-122"/>
-              </a:rPr>
-              <a:t>2</a:t>
-            </a:r>
-            <a:r>
-              <a:rPr lang="zh-CN" altLang="zh-CN" sz="1800" kern="100" dirty="0">
-                <a:solidFill>
-                  <a:srgbClr val="000000"/>
-                </a:solidFill>
-                <a:effectLst/>
-                <a:latin typeface="Times New Roman" panose="02020603050405020304" pitchFamily="18" charset="0"/>
-                <a:ea typeface="宋体" panose="02010600030101010101" pitchFamily="2" charset="-122"/>
-              </a:rPr>
-              <a:t>对</a:t>
-            </a:r>
-            <a:r>
-              <a:rPr lang="en-US" altLang="zh-CN" sz="1800" kern="100" dirty="0">
-                <a:solidFill>
-                  <a:srgbClr val="000000"/>
-                </a:solidFill>
-                <a:effectLst/>
-                <a:latin typeface="Times New Roman" panose="02020603050405020304" pitchFamily="18" charset="0"/>
-                <a:ea typeface="宋体" panose="02010600030101010101" pitchFamily="2" charset="-122"/>
-              </a:rPr>
-              <a:t>W</a:t>
-            </a:r>
-            <a:r>
-              <a:rPr lang="zh-CN" altLang="zh-CN" sz="1800" kern="100" dirty="0">
-                <a:solidFill>
-                  <a:srgbClr val="000000"/>
-                </a:solidFill>
-                <a:effectLst/>
-                <a:latin typeface="Times New Roman" panose="02020603050405020304" pitchFamily="18" charset="0"/>
-                <a:ea typeface="宋体" panose="02010600030101010101" pitchFamily="2" charset="-122"/>
-              </a:rPr>
-              <a:t>（通过</a:t>
-            </a:r>
-            <a:r>
-              <a:rPr lang="en-US" altLang="zh-CN" sz="1800" kern="100" dirty="0" err="1">
-                <a:solidFill>
-                  <a:srgbClr val="000000"/>
-                </a:solidFill>
-                <a:effectLst/>
-                <a:latin typeface="Times New Roman" panose="02020603050405020304" pitchFamily="18" charset="0"/>
-                <a:ea typeface="宋体" panose="02010600030101010101" pitchFamily="2" charset="-122"/>
-              </a:rPr>
-              <a:t>BioDistilBERT</a:t>
-            </a:r>
-            <a:r>
-              <a:rPr lang="zh-CN" altLang="zh-CN" sz="1800" kern="100" dirty="0">
-                <a:solidFill>
-                  <a:srgbClr val="000000"/>
-                </a:solidFill>
-                <a:effectLst/>
-                <a:latin typeface="Times New Roman" panose="02020603050405020304" pitchFamily="18" charset="0"/>
-                <a:ea typeface="宋体" panose="02010600030101010101" pitchFamily="2" charset="-122"/>
-              </a:rPr>
-              <a:t>提取的特征）和</a:t>
-            </a:r>
-            <a:r>
-              <a:rPr lang="en-US" altLang="zh-CN" sz="1800" kern="100" dirty="0">
-                <a:solidFill>
-                  <a:srgbClr val="000000"/>
-                </a:solidFill>
-                <a:effectLst/>
-                <a:latin typeface="Times New Roman" panose="02020603050405020304" pitchFamily="18" charset="0"/>
-                <a:ea typeface="宋体" panose="02010600030101010101" pitchFamily="2" charset="-122"/>
-              </a:rPr>
-              <a:t>C</a:t>
-            </a:r>
-            <a:r>
-              <a:rPr lang="en-US" altLang="zh-CN" sz="1800" kern="100" baseline="-25000" dirty="0">
-                <a:solidFill>
-                  <a:srgbClr val="000000"/>
-                </a:solidFill>
-                <a:effectLst/>
-                <a:latin typeface="Times New Roman" panose="02020603050405020304" pitchFamily="18" charset="0"/>
-                <a:ea typeface="宋体" panose="02010600030101010101" pitchFamily="2" charset="-122"/>
-              </a:rPr>
-              <a:t>L</a:t>
-            </a:r>
-            <a:r>
-              <a:rPr lang="en-US" altLang="zh-CN" sz="1800" kern="100" dirty="0">
-                <a:solidFill>
-                  <a:srgbClr val="000000"/>
-                </a:solidFill>
-                <a:effectLst/>
-                <a:latin typeface="Times New Roman" panose="02020603050405020304" pitchFamily="18" charset="0"/>
-                <a:ea typeface="宋体" panose="02010600030101010101" pitchFamily="2" charset="-122"/>
-              </a:rPr>
-              <a:t>(</a:t>
-            </a:r>
-            <a:r>
-              <a:rPr lang="zh-CN" altLang="zh-CN" sz="1800" kern="100" dirty="0">
-                <a:solidFill>
-                  <a:srgbClr val="000000"/>
-                </a:solidFill>
-                <a:effectLst/>
-                <a:latin typeface="Times New Roman" panose="02020603050405020304" pitchFamily="18" charset="0"/>
-                <a:ea typeface="宋体" panose="02010600030101010101" pitchFamily="2" charset="-122"/>
-              </a:rPr>
-              <a:t>通过</a:t>
-            </a:r>
-            <a:r>
-              <a:rPr lang="en-US" altLang="zh-CN" sz="1800" kern="100" dirty="0" err="1">
-                <a:solidFill>
-                  <a:srgbClr val="000000"/>
-                </a:solidFill>
-                <a:effectLst/>
-                <a:latin typeface="Times New Roman" panose="02020603050405020304" pitchFamily="18" charset="0"/>
-                <a:ea typeface="宋体" panose="02010600030101010101" pitchFamily="2" charset="-122"/>
-              </a:rPr>
-              <a:t>CharLSTM</a:t>
-            </a:r>
-            <a:r>
-              <a:rPr lang="zh-CN" altLang="zh-CN" sz="1800" kern="100" dirty="0">
-                <a:solidFill>
-                  <a:srgbClr val="000000"/>
-                </a:solidFill>
-                <a:effectLst/>
-                <a:latin typeface="Times New Roman" panose="02020603050405020304" pitchFamily="18" charset="0"/>
-                <a:ea typeface="宋体" panose="02010600030101010101" pitchFamily="2" charset="-122"/>
-              </a:rPr>
-              <a:t>提取的特征</a:t>
-            </a:r>
-            <a:r>
-              <a:rPr lang="en-US" altLang="zh-CN" sz="1800" kern="100" dirty="0">
-                <a:solidFill>
-                  <a:srgbClr val="000000"/>
-                </a:solidFill>
-                <a:effectLst/>
-                <a:latin typeface="Times New Roman" panose="02020603050405020304" pitchFamily="18" charset="0"/>
-                <a:ea typeface="宋体" panose="02010600030101010101" pitchFamily="2" charset="-122"/>
-              </a:rPr>
-              <a:t>)</a:t>
-            </a:r>
-            <a:r>
-              <a:rPr lang="zh-CN" altLang="zh-CN" sz="1800" kern="100" dirty="0">
-                <a:solidFill>
-                  <a:srgbClr val="000000"/>
-                </a:solidFill>
-                <a:effectLst/>
-                <a:latin typeface="Times New Roman" panose="02020603050405020304" pitchFamily="18" charset="0"/>
-                <a:ea typeface="宋体" panose="02010600030101010101" pitchFamily="2" charset="-122"/>
-              </a:rPr>
-              <a:t>进行交叉注意力融合，其他两次进行直接拼接，方法</a:t>
-            </a:r>
-            <a:r>
-              <a:rPr lang="en-US" altLang="zh-CN" sz="1800" kern="100" dirty="0">
-                <a:solidFill>
-                  <a:srgbClr val="000000"/>
-                </a:solidFill>
-                <a:effectLst/>
-                <a:latin typeface="Times New Roman" panose="02020603050405020304" pitchFamily="18" charset="0"/>
-                <a:ea typeface="宋体" panose="02010600030101010101" pitchFamily="2" charset="-122"/>
-              </a:rPr>
-              <a:t>3</a:t>
-            </a:r>
-            <a:r>
-              <a:rPr lang="zh-CN" altLang="zh-CN" sz="1800" kern="100" dirty="0">
-                <a:solidFill>
-                  <a:srgbClr val="000000"/>
-                </a:solidFill>
-                <a:effectLst/>
-                <a:latin typeface="Times New Roman" panose="02020603050405020304" pitchFamily="18" charset="0"/>
-                <a:ea typeface="宋体" panose="02010600030101010101" pitchFamily="2" charset="-122"/>
-              </a:rPr>
-              <a:t>对</a:t>
-            </a:r>
-            <a:r>
-              <a:rPr lang="en-US" altLang="zh-CN" sz="1800" kern="100" dirty="0">
-                <a:solidFill>
-                  <a:srgbClr val="000000"/>
-                </a:solidFill>
-                <a:effectLst/>
-                <a:latin typeface="Times New Roman" panose="02020603050405020304" pitchFamily="18" charset="0"/>
-                <a:ea typeface="宋体" panose="02010600030101010101" pitchFamily="2" charset="-122"/>
-              </a:rPr>
-              <a:t>W</a:t>
-            </a:r>
-            <a:r>
-              <a:rPr lang="zh-CN" altLang="zh-CN" sz="1800" kern="100" dirty="0">
-                <a:solidFill>
-                  <a:srgbClr val="000000"/>
-                </a:solidFill>
-                <a:effectLst/>
-                <a:latin typeface="Times New Roman" panose="02020603050405020304" pitchFamily="18" charset="0"/>
-                <a:ea typeface="宋体" panose="02010600030101010101" pitchFamily="2" charset="-122"/>
-              </a:rPr>
-              <a:t>和</a:t>
-            </a:r>
-            <a:r>
-              <a:rPr lang="en-US" altLang="zh-CN" sz="1800" kern="100" dirty="0">
-                <a:solidFill>
-                  <a:srgbClr val="000000"/>
-                </a:solidFill>
-                <a:effectLst/>
-                <a:latin typeface="Times New Roman" panose="02020603050405020304" pitchFamily="18" charset="0"/>
-                <a:ea typeface="宋体" panose="02010600030101010101" pitchFamily="2" charset="-122"/>
-              </a:rPr>
-              <a:t>C</a:t>
-            </a:r>
-            <a:r>
-              <a:rPr lang="en-US" altLang="zh-CN" sz="1800" kern="100" baseline="-25000" dirty="0">
-                <a:solidFill>
-                  <a:srgbClr val="000000"/>
-                </a:solidFill>
-                <a:effectLst/>
-                <a:latin typeface="Times New Roman" panose="02020603050405020304" pitchFamily="18" charset="0"/>
-                <a:ea typeface="宋体" panose="02010600030101010101" pitchFamily="2" charset="-122"/>
-              </a:rPr>
-              <a:t>C</a:t>
-            </a:r>
-            <a:r>
-              <a:rPr lang="zh-CN" altLang="zh-CN" sz="1800" kern="100" dirty="0">
-                <a:solidFill>
-                  <a:srgbClr val="000000"/>
-                </a:solidFill>
-                <a:effectLst/>
-                <a:latin typeface="Times New Roman" panose="02020603050405020304" pitchFamily="18" charset="0"/>
-                <a:ea typeface="宋体" panose="02010600030101010101" pitchFamily="2" charset="-122"/>
-              </a:rPr>
-              <a:t>（通过</a:t>
-            </a:r>
-            <a:r>
-              <a:rPr lang="en-US" altLang="zh-CN" sz="1800" kern="100" dirty="0" err="1">
-                <a:solidFill>
-                  <a:srgbClr val="000000"/>
-                </a:solidFill>
-                <a:effectLst/>
-                <a:latin typeface="Times New Roman" panose="02020603050405020304" pitchFamily="18" charset="0"/>
-                <a:ea typeface="宋体" panose="02010600030101010101" pitchFamily="2" charset="-122"/>
-              </a:rPr>
-              <a:t>CharCNN</a:t>
-            </a:r>
-            <a:r>
-              <a:rPr lang="zh-CN" altLang="zh-CN" sz="1800" kern="100" dirty="0">
-                <a:solidFill>
-                  <a:srgbClr val="000000"/>
-                </a:solidFill>
-                <a:effectLst/>
-                <a:latin typeface="Times New Roman" panose="02020603050405020304" pitchFamily="18" charset="0"/>
-                <a:ea typeface="宋体" panose="02010600030101010101" pitchFamily="2" charset="-122"/>
-              </a:rPr>
-              <a:t>提取的特征）进行交叉注意力融合，其他两次进行直接拼接，方法</a:t>
-            </a:r>
-            <a:r>
-              <a:rPr lang="en-US" altLang="zh-CN" sz="1800" kern="100" dirty="0">
-                <a:solidFill>
-                  <a:srgbClr val="000000"/>
-                </a:solidFill>
-                <a:effectLst/>
-                <a:latin typeface="Times New Roman" panose="02020603050405020304" pitchFamily="18" charset="0"/>
-                <a:ea typeface="宋体" panose="02010600030101010101" pitchFamily="2" charset="-122"/>
-              </a:rPr>
-              <a:t>4</a:t>
-            </a:r>
-            <a:r>
-              <a:rPr lang="zh-CN" altLang="zh-CN" sz="1800" kern="100" dirty="0">
-                <a:solidFill>
-                  <a:srgbClr val="000000"/>
-                </a:solidFill>
-                <a:effectLst/>
-                <a:latin typeface="Times New Roman" panose="02020603050405020304" pitchFamily="18" charset="0"/>
-                <a:ea typeface="宋体" panose="02010600030101010101" pitchFamily="2" charset="-122"/>
-              </a:rPr>
-              <a:t>对</a:t>
-            </a:r>
-            <a:r>
-              <a:rPr lang="en-US" altLang="zh-CN" sz="1800" kern="100" dirty="0">
-                <a:solidFill>
-                  <a:srgbClr val="000000"/>
-                </a:solidFill>
-                <a:effectLst/>
-                <a:latin typeface="Times New Roman" panose="02020603050405020304" pitchFamily="18" charset="0"/>
-                <a:ea typeface="宋体" panose="02010600030101010101" pitchFamily="2" charset="-122"/>
-              </a:rPr>
-              <a:t>W</a:t>
-            </a:r>
-            <a:r>
-              <a:rPr lang="zh-CN" altLang="zh-CN" sz="1800" kern="100" dirty="0">
-                <a:solidFill>
-                  <a:srgbClr val="000000"/>
-                </a:solidFill>
-                <a:effectLst/>
-                <a:latin typeface="Times New Roman" panose="02020603050405020304" pitchFamily="18" charset="0"/>
-                <a:ea typeface="宋体" panose="02010600030101010101" pitchFamily="2" charset="-122"/>
-              </a:rPr>
-              <a:t>和</a:t>
-            </a:r>
-            <a:r>
-              <a:rPr lang="en-US" altLang="zh-CN" sz="1800" kern="100" dirty="0">
-                <a:solidFill>
-                  <a:srgbClr val="000000"/>
-                </a:solidFill>
-                <a:effectLst/>
-                <a:latin typeface="Times New Roman" panose="02020603050405020304" pitchFamily="18" charset="0"/>
-                <a:ea typeface="宋体" panose="02010600030101010101" pitchFamily="2" charset="-122"/>
-              </a:rPr>
-              <a:t>C</a:t>
-            </a:r>
-            <a:r>
-              <a:rPr lang="en-US" altLang="zh-CN" sz="1800" kern="100" baseline="-25000" dirty="0">
-                <a:solidFill>
-                  <a:srgbClr val="000000"/>
-                </a:solidFill>
-                <a:effectLst/>
-                <a:latin typeface="Times New Roman" panose="02020603050405020304" pitchFamily="18" charset="0"/>
-                <a:ea typeface="宋体" panose="02010600030101010101" pitchFamily="2" charset="-122"/>
-              </a:rPr>
-              <a:t>C</a:t>
-            </a:r>
-            <a:r>
-              <a:rPr lang="zh-CN" altLang="zh-CN" sz="1800" kern="100" dirty="0">
-                <a:solidFill>
-                  <a:srgbClr val="000000"/>
-                </a:solidFill>
-                <a:effectLst/>
-                <a:latin typeface="Times New Roman" panose="02020603050405020304" pitchFamily="18" charset="0"/>
-                <a:ea typeface="宋体" panose="02010600030101010101" pitchFamily="2" charset="-122"/>
-              </a:rPr>
-              <a:t>以及</a:t>
-            </a:r>
-            <a:r>
-              <a:rPr lang="en-US" altLang="zh-CN" sz="1800" kern="100" dirty="0">
-                <a:solidFill>
-                  <a:srgbClr val="000000"/>
-                </a:solidFill>
-                <a:effectLst/>
-                <a:latin typeface="Times New Roman" panose="02020603050405020304" pitchFamily="18" charset="0"/>
-                <a:ea typeface="宋体" panose="02010600030101010101" pitchFamily="2" charset="-122"/>
-              </a:rPr>
-              <a:t>C</a:t>
-            </a:r>
-            <a:r>
-              <a:rPr lang="en-US" altLang="zh-CN" sz="1800" kern="100" baseline="-25000" dirty="0">
-                <a:solidFill>
-                  <a:srgbClr val="000000"/>
-                </a:solidFill>
-                <a:effectLst/>
-                <a:latin typeface="Times New Roman" panose="02020603050405020304" pitchFamily="18" charset="0"/>
-                <a:ea typeface="宋体" panose="02010600030101010101" pitchFamily="2" charset="-122"/>
-              </a:rPr>
-              <a:t>L</a:t>
-            </a:r>
-            <a:r>
-              <a:rPr lang="zh-CN" altLang="zh-CN" sz="1800" kern="100" dirty="0">
-                <a:solidFill>
-                  <a:srgbClr val="000000"/>
-                </a:solidFill>
-                <a:effectLst/>
-                <a:latin typeface="Times New Roman" panose="02020603050405020304" pitchFamily="18" charset="0"/>
-                <a:ea typeface="宋体" panose="02010600030101010101" pitchFamily="2" charset="-122"/>
-              </a:rPr>
-              <a:t>分别进行直接拼接，最后一次融合进行交叉注意力融合，方法</a:t>
-            </a:r>
-            <a:r>
-              <a:rPr lang="en-US" altLang="zh-CN" sz="1800" kern="100" dirty="0">
-                <a:solidFill>
-                  <a:srgbClr val="000000"/>
-                </a:solidFill>
-                <a:effectLst/>
-                <a:latin typeface="Times New Roman" panose="02020603050405020304" pitchFamily="18" charset="0"/>
-                <a:ea typeface="宋体" panose="02010600030101010101" pitchFamily="2" charset="-122"/>
-              </a:rPr>
-              <a:t>5</a:t>
-            </a:r>
-            <a:r>
-              <a:rPr lang="zh-CN" altLang="zh-CN" sz="1800" kern="100" dirty="0">
-                <a:solidFill>
-                  <a:srgbClr val="000000"/>
-                </a:solidFill>
-                <a:effectLst/>
-                <a:latin typeface="Times New Roman" panose="02020603050405020304" pitchFamily="18" charset="0"/>
-                <a:ea typeface="宋体" panose="02010600030101010101" pitchFamily="2" charset="-122"/>
-              </a:rPr>
-              <a:t>对</a:t>
-            </a:r>
-            <a:r>
-              <a:rPr lang="en-US" altLang="zh-CN" sz="1800" kern="100" dirty="0">
-                <a:solidFill>
-                  <a:srgbClr val="000000"/>
-                </a:solidFill>
-                <a:effectLst/>
-                <a:latin typeface="Times New Roman" panose="02020603050405020304" pitchFamily="18" charset="0"/>
-                <a:ea typeface="宋体" panose="02010600030101010101" pitchFamily="2" charset="-122"/>
-              </a:rPr>
-              <a:t>W</a:t>
-            </a:r>
-            <a:r>
-              <a:rPr lang="zh-CN" altLang="zh-CN" sz="1800" kern="100" dirty="0">
-                <a:solidFill>
-                  <a:srgbClr val="000000"/>
-                </a:solidFill>
-                <a:effectLst/>
-                <a:latin typeface="Times New Roman" panose="02020603050405020304" pitchFamily="18" charset="0"/>
-                <a:ea typeface="宋体" panose="02010600030101010101" pitchFamily="2" charset="-122"/>
-              </a:rPr>
-              <a:t>和</a:t>
-            </a:r>
-            <a:r>
-              <a:rPr lang="en-US" altLang="zh-CN" sz="1800" kern="100" dirty="0">
-                <a:solidFill>
-                  <a:srgbClr val="000000"/>
-                </a:solidFill>
-                <a:effectLst/>
-                <a:latin typeface="Times New Roman" panose="02020603050405020304" pitchFamily="18" charset="0"/>
-                <a:ea typeface="宋体" panose="02010600030101010101" pitchFamily="2" charset="-122"/>
-              </a:rPr>
-              <a:t>C</a:t>
-            </a:r>
-            <a:r>
-              <a:rPr lang="en-US" altLang="zh-CN" sz="1800" kern="100" baseline="-25000" dirty="0">
-                <a:solidFill>
-                  <a:srgbClr val="000000"/>
-                </a:solidFill>
-                <a:effectLst/>
-                <a:latin typeface="Times New Roman" panose="02020603050405020304" pitchFamily="18" charset="0"/>
-                <a:ea typeface="宋体" panose="02010600030101010101" pitchFamily="2" charset="-122"/>
-              </a:rPr>
-              <a:t>C</a:t>
-            </a:r>
-            <a:r>
-              <a:rPr lang="zh-CN" altLang="zh-CN" sz="1800" kern="100" dirty="0">
-                <a:solidFill>
-                  <a:srgbClr val="000000"/>
-                </a:solidFill>
-                <a:effectLst/>
-                <a:latin typeface="Times New Roman" panose="02020603050405020304" pitchFamily="18" charset="0"/>
-                <a:ea typeface="宋体" panose="02010600030101010101" pitchFamily="2" charset="-122"/>
-              </a:rPr>
-              <a:t>以及</a:t>
-            </a:r>
-            <a:r>
-              <a:rPr lang="en-US" altLang="zh-CN" sz="1800" kern="100" dirty="0">
-                <a:solidFill>
-                  <a:srgbClr val="000000"/>
-                </a:solidFill>
-                <a:effectLst/>
-                <a:latin typeface="Times New Roman" panose="02020603050405020304" pitchFamily="18" charset="0"/>
-                <a:ea typeface="宋体" panose="02010600030101010101" pitchFamily="2" charset="-122"/>
-              </a:rPr>
-              <a:t>C</a:t>
-            </a:r>
-            <a:r>
-              <a:rPr lang="en-US" altLang="zh-CN" sz="1800" kern="100" baseline="-25000" dirty="0">
-                <a:solidFill>
-                  <a:srgbClr val="000000"/>
-                </a:solidFill>
-                <a:effectLst/>
-                <a:latin typeface="Times New Roman" panose="02020603050405020304" pitchFamily="18" charset="0"/>
-                <a:ea typeface="宋体" panose="02010600030101010101" pitchFamily="2" charset="-122"/>
-              </a:rPr>
-              <a:t>L</a:t>
-            </a:r>
-            <a:r>
-              <a:rPr lang="zh-CN" altLang="zh-CN" sz="1800" kern="100" dirty="0">
-                <a:solidFill>
-                  <a:srgbClr val="000000"/>
-                </a:solidFill>
-                <a:effectLst/>
-                <a:latin typeface="Times New Roman" panose="02020603050405020304" pitchFamily="18" charset="0"/>
-                <a:ea typeface="宋体" panose="02010600030101010101" pitchFamily="2" charset="-122"/>
-              </a:rPr>
-              <a:t>分别进行交叉注意力融合，最后一次融合进行直接拼接，方法</a:t>
-            </a:r>
-            <a:r>
-              <a:rPr lang="en-US" altLang="zh-CN" sz="1800" kern="100" dirty="0">
-                <a:solidFill>
-                  <a:srgbClr val="000000"/>
-                </a:solidFill>
-                <a:effectLst/>
-                <a:latin typeface="Times New Roman" panose="02020603050405020304" pitchFamily="18" charset="0"/>
-                <a:ea typeface="宋体" panose="02010600030101010101" pitchFamily="2" charset="-122"/>
-              </a:rPr>
-              <a:t>6</a:t>
-            </a:r>
-            <a:r>
-              <a:rPr lang="zh-CN" altLang="zh-CN" sz="1800" kern="100" dirty="0">
-                <a:solidFill>
-                  <a:srgbClr val="000000"/>
-                </a:solidFill>
-                <a:effectLst/>
-                <a:latin typeface="Times New Roman" panose="02020603050405020304" pitchFamily="18" charset="0"/>
-                <a:ea typeface="宋体" panose="02010600030101010101" pitchFamily="2" charset="-122"/>
-              </a:rPr>
-              <a:t>即本文提出所使用的三次交叉注意力融合方法。</a:t>
-            </a:r>
-            <a:endParaRPr lang="zh-CN" altLang="zh-CN" sz="1800" kern="100" dirty="0">
-              <a:effectLst/>
-              <a:latin typeface="Times New Roman" panose="02020603050405020304" pitchFamily="18" charset="0"/>
-              <a:ea typeface="宋体" panose="02010600030101010101" pitchFamily="2" charset="-122"/>
-            </a:endParaRPr>
-          </a:p>
-          <a:p>
             <a:endParaRPr lang="zh-CN" altLang="en-US" dirty="0"/>
           </a:p>
         </p:txBody>
@@ -2606,118 +801,6 @@
           <a:bodyPr/>
           <a:lstStyle/>
           <a:p>
-            <a:r>
-              <a:rPr lang="zh-CN" altLang="en-US" sz="1200" kern="100" dirty="0">
-                <a:latin typeface="Times New Roman" panose="02020603050405020304" pitchFamily="18" charset="0"/>
-                <a:ea typeface="宋体" panose="02010600030101010101" pitchFamily="2" charset="-122"/>
-                <a:cs typeface="Times New Roman" panose="02020603050405020304" pitchFamily="18" charset="0"/>
-              </a:rPr>
-              <a:t>基于生物医学实体多存在嵌套和不连续现象，本文提出了一个名为</a:t>
-            </a:r>
-            <a:r>
-              <a:rPr lang="en-US" altLang="zh-CN" sz="1200" kern="100" dirty="0">
-                <a:latin typeface="Times New Roman" panose="02020603050405020304" pitchFamily="18" charset="0"/>
-                <a:ea typeface="宋体" panose="02010600030101010101" pitchFamily="2" charset="-122"/>
-                <a:cs typeface="Times New Roman" panose="02020603050405020304" pitchFamily="18" charset="0"/>
-              </a:rPr>
-              <a:t>KGCTM</a:t>
-            </a:r>
-            <a:r>
-              <a:rPr lang="zh-CN" altLang="en-US" sz="1200" kern="100" dirty="0">
-                <a:latin typeface="Times New Roman" panose="02020603050405020304" pitchFamily="18" charset="0"/>
-                <a:ea typeface="宋体" panose="02010600030101010101" pitchFamily="2" charset="-122"/>
-                <a:cs typeface="Times New Roman" panose="02020603050405020304" pitchFamily="18" charset="0"/>
-              </a:rPr>
-              <a:t>（</a:t>
-            </a:r>
-            <a:r>
-              <a:rPr lang="en-US" altLang="zh-CN" sz="1200" kern="100" dirty="0" err="1">
-                <a:latin typeface="Times New Roman" panose="02020603050405020304" pitchFamily="18" charset="0"/>
-                <a:ea typeface="宋体" panose="02010600030101010101" pitchFamily="2" charset="-122"/>
-                <a:cs typeface="Times New Roman" panose="02020603050405020304" pitchFamily="18" charset="0"/>
-              </a:rPr>
-              <a:t>KeBioLM</a:t>
-            </a:r>
-            <a:r>
-              <a:rPr lang="en-US" altLang="zh-CN" sz="1200" kern="100" dirty="0">
-                <a:latin typeface="Times New Roman" panose="02020603050405020304" pitchFamily="18" charset="0"/>
-                <a:ea typeface="宋体" panose="02010600030101010101" pitchFamily="2" charset="-122"/>
-                <a:cs typeface="Times New Roman" panose="02020603050405020304" pitchFamily="18" charset="0"/>
-              </a:rPr>
-              <a:t>-ATT-</a:t>
-            </a:r>
-            <a:r>
-              <a:rPr lang="en-US" altLang="zh-CN" sz="1200" kern="100" dirty="0" err="1">
-                <a:latin typeface="Times New Roman" panose="02020603050405020304" pitchFamily="18" charset="0"/>
-                <a:ea typeface="宋体" panose="02010600030101010101" pitchFamily="2" charset="-122"/>
-                <a:cs typeface="Times New Roman" panose="02020603050405020304" pitchFamily="18" charset="0"/>
-              </a:rPr>
-              <a:t>BiGRU</a:t>
-            </a:r>
-            <a:r>
-              <a:rPr lang="en-US" altLang="zh-CN" sz="1200" kern="100" dirty="0">
-                <a:latin typeface="Times New Roman" panose="02020603050405020304" pitchFamily="18" charset="0"/>
-                <a:ea typeface="宋体" panose="02010600030101010101" pitchFamily="2" charset="-122"/>
-                <a:cs typeface="Times New Roman" panose="02020603050405020304" pitchFamily="18" charset="0"/>
-              </a:rPr>
-              <a:t>-CNN-</a:t>
-            </a:r>
-            <a:r>
-              <a:rPr lang="en-US" altLang="zh-CN" sz="1200" kern="100" dirty="0" err="1">
-                <a:latin typeface="Times New Roman" panose="02020603050405020304" pitchFamily="18" charset="0"/>
-                <a:ea typeface="宋体" panose="02010600030101010101" pitchFamily="2" charset="-122"/>
-                <a:cs typeface="Times New Roman" panose="02020603050405020304" pitchFamily="18" charset="0"/>
-              </a:rPr>
-              <a:t>Traffine</a:t>
-            </a:r>
-            <a:r>
-              <a:rPr lang="en-US" altLang="zh-CN" sz="1200" kern="100" dirty="0">
-                <a:latin typeface="Times New Roman" panose="02020603050405020304" pitchFamily="18" charset="0"/>
-                <a:ea typeface="宋体" panose="02010600030101010101" pitchFamily="2" charset="-122"/>
-                <a:cs typeface="Times New Roman" panose="02020603050405020304" pitchFamily="18" charset="0"/>
-              </a:rPr>
-              <a:t>-MLP</a:t>
-            </a:r>
-            <a:r>
-              <a:rPr lang="zh-CN" altLang="en-US" sz="1200" kern="100" dirty="0">
-                <a:latin typeface="Times New Roman" panose="02020603050405020304" pitchFamily="18" charset="0"/>
-                <a:ea typeface="宋体" panose="02010600030101010101" pitchFamily="2" charset="-122"/>
-                <a:cs typeface="Times New Roman" panose="02020603050405020304" pitchFamily="18" charset="0"/>
-              </a:rPr>
-              <a:t>）的模型，主要通过对词与词之间的关系进行预测从而识别嵌套和不连续实体。该模型主要分为四个模块：编码层、混合卷积层、预测层以及解码层。在模型训练中加入基于</a:t>
-            </a:r>
-            <a:r>
-              <a:rPr lang="en-US" altLang="zh-CN" sz="1200" kern="100" dirty="0">
-                <a:latin typeface="Times New Roman" panose="02020603050405020304" pitchFamily="18" charset="0"/>
-                <a:ea typeface="宋体" panose="02010600030101010101" pitchFamily="2" charset="-122"/>
-                <a:cs typeface="Times New Roman" panose="02020603050405020304" pitchFamily="18" charset="0"/>
-              </a:rPr>
-              <a:t>PGD</a:t>
-            </a:r>
-            <a:r>
-              <a:rPr lang="zh-CN" altLang="en-US" sz="1200" kern="100" dirty="0">
-                <a:latin typeface="Times New Roman" panose="02020603050405020304" pitchFamily="18" charset="0"/>
-                <a:ea typeface="宋体" panose="02010600030101010101" pitchFamily="2" charset="-122"/>
-                <a:cs typeface="Times New Roman" panose="02020603050405020304" pitchFamily="18" charset="0"/>
-              </a:rPr>
-              <a:t>的对抗训练，同时通过对</a:t>
-            </a:r>
-            <a:r>
-              <a:rPr lang="en-US" altLang="zh-CN" sz="1200" kern="100" dirty="0">
-                <a:latin typeface="Times New Roman" panose="02020603050405020304" pitchFamily="18" charset="0"/>
-                <a:ea typeface="宋体" panose="02010600030101010101" pitchFamily="2" charset="-122"/>
-                <a:cs typeface="Times New Roman" panose="02020603050405020304" pitchFamily="18" charset="0"/>
-              </a:rPr>
-              <a:t>Dice Loss</a:t>
-            </a:r>
-            <a:r>
-              <a:rPr lang="zh-CN" altLang="en-US" sz="1200" kern="100" dirty="0">
-                <a:latin typeface="Times New Roman" panose="02020603050405020304" pitchFamily="18" charset="0"/>
-                <a:ea typeface="宋体" panose="02010600030101010101" pitchFamily="2" charset="-122"/>
-                <a:cs typeface="Times New Roman" panose="02020603050405020304" pitchFamily="18" charset="0"/>
-              </a:rPr>
-              <a:t>和交叉熵损失函数赋予不同的权重来对模型进行训练，解决数据不平衡问题。</a:t>
-            </a:r>
             <a:endParaRPr lang="zh-CN" altLang="en-US" dirty="0"/>
           </a:p>
         </p:txBody>
@@ -2903,7 +986,7 @@
           <a:p>
             <a:fld id="{760FBDFE-C587-4B4C-A407-44438C67B59E}" type="datetimeFigureOut">
               <a:rPr lang="zh-CN" altLang="en-US" smtClean="0"/>
-              <a:t>2024/5/24</a:t>
+              <a:t>2026/5/25</a:t>
             </a:fld>
             <a:endParaRPr lang="zh-CN" altLang="en-US"/>
           </a:p>
@@ -3002,7 +1085,7 @@
           <a:p>
             <a:fld id="{760FBDFE-C587-4B4C-A407-44438C67B59E}" type="datetimeFigureOut">
               <a:rPr lang="zh-CN" altLang="en-US" smtClean="0"/>
-              <a:t>2024/5/24</a:t>
+              <a:t>2026/5/25</a:t>
             </a:fld>
             <a:endParaRPr lang="zh-CN" altLang="en-US"/>
           </a:p>
@@ -3160,7 +1243,7 @@
           <a:p>
             <a:fld id="{760FBDFE-C587-4B4C-A407-44438C67B59E}" type="datetimeFigureOut">
               <a:rPr lang="zh-CN" altLang="en-US" smtClean="0"/>
-              <a:t>2024/5/24</a:t>
+              <a:t>2026/5/25</a:t>
             </a:fld>
             <a:endParaRPr lang="zh-CN" altLang="en-US"/>
           </a:p>
@@ -3456,7 +1539,7 @@
           <a:p>
             <a:fld id="{760FBDFE-C587-4B4C-A407-44438C67B59E}" type="datetimeFigureOut">
               <a:rPr lang="zh-CN" altLang="en-US" smtClean="0"/>
-              <a:t>2024/5/24</a:t>
+              <a:t>2026/5/25</a:t>
             </a:fld>
             <a:endParaRPr lang="zh-CN" altLang="en-US"/>
           </a:p>
@@ -3716,7 +1799,7 @@
           <a:p>
             <a:fld id="{760FBDFE-C587-4B4C-A407-44438C67B59E}" type="datetimeFigureOut">
               <a:rPr lang="zh-CN" altLang="en-US" smtClean="0"/>
-              <a:t>2024/5/24</a:t>
+              <a:t>2026/5/25</a:t>
             </a:fld>
             <a:endParaRPr lang="zh-CN" altLang="en-US"/>
           </a:p>
@@ -3970,7 +2053,7 @@
           <a:p>
             <a:fld id="{760FBDFE-C587-4B4C-A407-44438C67B59E}" type="datetimeFigureOut">
               <a:rPr lang="zh-CN" altLang="en-US" smtClean="0"/>
-              <a:t>2024/5/24</a:t>
+              <a:t>2026/5/25</a:t>
             </a:fld>
             <a:endParaRPr lang="zh-CN" altLang="en-US"/>
           </a:p>
@@ -4384,7 +2467,7 @@
           <a:p>
             <a:fld id="{760FBDFE-C587-4B4C-A407-44438C67B59E}" type="datetimeFigureOut">
               <a:rPr lang="zh-CN" altLang="en-US" smtClean="0"/>
-              <a:t>2024/5/24</a:t>
+              <a:t>2026/5/25</a:t>
             </a:fld>
             <a:endParaRPr lang="zh-CN" altLang="en-US"/>
           </a:p>
@@ -4516,7 +2599,7 @@
           <a:p>
             <a:fld id="{760FBDFE-C587-4B4C-A407-44438C67B59E}" type="datetimeFigureOut">
               <a:rPr lang="zh-CN" altLang="en-US" smtClean="0"/>
-              <a:t>2024/5/24</a:t>
+              <a:t>2026/5/25</a:t>
             </a:fld>
             <a:endParaRPr lang="zh-CN" altLang="en-US"/>
           </a:p>
@@ -4615,7 +2698,7 @@
           <a:p>
             <a:fld id="{760FBDFE-C587-4B4C-A407-44438C67B59E}" type="datetimeFigureOut">
               <a:rPr lang="zh-CN" altLang="en-US" smtClean="0"/>
-              <a:t>2024/5/24</a:t>
+              <a:t>2026/5/25</a:t>
             </a:fld>
             <a:endParaRPr lang="zh-CN" altLang="en-US"/>
           </a:p>
@@ -4787,7 +2870,7 @@
           <a:p>
             <a:fld id="{9EFD9D74-47D9-4702-A33C-335B63B48DBF}" type="datetimeFigureOut">
               <a:rPr lang="zh-CN" altLang="en-US" smtClean="0"/>
-              <a:t>2024/5/24</a:t>
+              <a:t>2026/5/25</a:t>
             </a:fld>
             <a:endParaRPr lang="zh-CN" altLang="en-US" dirty="0"/>
           </a:p>
@@ -5027,7 +3110,7 @@
           <a:p>
             <a:fld id="{760FBDFE-C587-4B4C-A407-44438C67B59E}" type="datetimeFigureOut">
               <a:rPr lang="zh-CN" altLang="en-US" smtClean="0"/>
-              <a:t>2024/5/24</a:t>
+              <a:t>2026/5/25</a:t>
             </a:fld>
             <a:endParaRPr lang="zh-CN" altLang="en-US"/>
           </a:p>
@@ -5253,7 +3336,7 @@
           <a:p>
             <a:fld id="{760FBDFE-C587-4B4C-A407-44438C67B59E}" type="datetimeFigureOut">
               <a:rPr lang="zh-CN" altLang="en-US" smtClean="0"/>
-              <a:t>2024/5/24</a:t>
+              <a:t>2026/5/25</a:t>
             </a:fld>
             <a:endParaRPr lang="zh-CN" altLang="en-US"/>
           </a:p>
@@ -9822,6 +7905,7 @@
                 <a:spcPts val="600"/>
               </a:spcAft>
             </a:pPr>
+            <a:endParaRPr/>
           </a:p>
         </p:txBody>
       </p:sp>
@@ -11524,532 +9608,6 @@
           </a:p>
         </p:txBody>
       </p:sp>
-      <mc:AlternateContent xmlns:mc="http://schemas.openxmlformats.org/markup-compatibility/2006">
-        <mc:Choice xmlns:a14="http://schemas.microsoft.com/office/drawing/2010/main" Requires="a14">
-          <p:sp>
-            <p:nvSpPr>
-              <p:cNvPr id="10" name="文本框 9">
-                <a:extLst>
-                  <a:ext uri="{FF2B5EF4-FFF2-40B4-BE49-F238E27FC236}">
-                    <a16:creationId xmlns:a16="http://schemas.microsoft.com/office/drawing/2014/main" id="{D99C9967-6999-4DA4-7495-FBB8F9363B91}"/>
-                  </a:ext>
-                </a:extLst>
-              </p:cNvPr>
-              <p:cNvSpPr txBox="1"/>
-              <p:nvPr/>
-            </p:nvSpPr>
-            <p:spPr>
-              <a:xfrm>
-                <a:off x="795868" y="2812877"/>
-                <a:ext cx="9863668" cy="2532745"/>
-              </a:xfrm>
-              <a:prstGeom prst="rect">
-                <a:avLst/>
-              </a:prstGeom>
-              <a:noFill/>
-            </p:spPr>
-            <p:txBody>
-              <a:bodyPr wrap="square">
-                <a:spAutoFit/>
-              </a:bodyPr>
-              <a:lstStyle/>
-              <a:p>
-                <a:pPr indent="304800" algn="just">
-                  <a:lnSpc>
-                    <a:spcPct val="150000"/>
-                  </a:lnSpc>
-                </a:pPr>
-                <a:r>
-                  <a:rPr lang="zh-CN" altLang="zh-CN" sz="1800" kern="100" dirty="0">
-                    <a:solidFill>
-                      <a:srgbClr val="000000"/>
-                    </a:solidFill>
-                    <a:effectLst/>
-                    <a:latin typeface="Times New Roman" panose="02020603050405020304" pitchFamily="18" charset="0"/>
-                    <a:ea typeface="宋体" panose="02010600030101010101" pitchFamily="2" charset="-122"/>
-                  </a:rPr>
-                  <a:t>本</a:t>
-                </a:r>
-                <a:r>
-                  <a:rPr lang="zh-CN" altLang="en-US" sz="1800" kern="100" dirty="0">
-                    <a:solidFill>
-                      <a:srgbClr val="000000"/>
-                    </a:solidFill>
-                    <a:effectLst/>
-                    <a:latin typeface="Times New Roman" panose="02020603050405020304" pitchFamily="18" charset="0"/>
-                    <a:ea typeface="宋体" panose="02010600030101010101" pitchFamily="2" charset="-122"/>
-                  </a:rPr>
-                  <a:t>实验</a:t>
-                </a:r>
-                <a:r>
-                  <a:rPr lang="zh-CN" altLang="zh-CN" sz="1800" kern="100" dirty="0">
-                    <a:solidFill>
-                      <a:srgbClr val="000000"/>
-                    </a:solidFill>
-                    <a:effectLst/>
-                    <a:latin typeface="Times New Roman" panose="02020603050405020304" pitchFamily="18" charset="0"/>
-                    <a:ea typeface="宋体" panose="02010600030101010101" pitchFamily="2" charset="-122"/>
-                  </a:rPr>
-                  <a:t>通过在</a:t>
-                </a:r>
-                <a:r>
-                  <a:rPr lang="en-US" altLang="zh-CN" sz="1800" kern="100" dirty="0">
-                    <a:solidFill>
-                      <a:srgbClr val="000000"/>
-                    </a:solidFill>
-                    <a:effectLst/>
-                    <a:latin typeface="Times New Roman" panose="02020603050405020304" pitchFamily="18" charset="0"/>
-                    <a:ea typeface="宋体" panose="02010600030101010101" pitchFamily="2" charset="-122"/>
-                  </a:rPr>
-                  <a:t>CADEC</a:t>
-                </a:r>
-                <a:r>
-                  <a:rPr lang="zh-CN" altLang="zh-CN" sz="1800" kern="100" dirty="0">
-                    <a:solidFill>
-                      <a:srgbClr val="000000"/>
-                    </a:solidFill>
-                    <a:effectLst/>
-                    <a:latin typeface="Times New Roman" panose="02020603050405020304" pitchFamily="18" charset="0"/>
-                    <a:ea typeface="宋体" panose="02010600030101010101" pitchFamily="2" charset="-122"/>
-                  </a:rPr>
-                  <a:t>数据集上使用</a:t>
-                </a:r>
-                <a14:m>
-                  <m:oMath xmlns:m="http://schemas.openxmlformats.org/officeDocument/2006/math">
-                    <m:r>
-                      <a:rPr lang="en-US" altLang="zh-CN" sz="1800" i="1" kern="100">
-                        <a:solidFill>
-                          <a:srgbClr val="000000"/>
-                        </a:solidFill>
-                        <a:effectLst/>
-                        <a:latin typeface="Cambria Math" panose="02040503050406030204" pitchFamily="18" charset="0"/>
-                        <a:ea typeface="宋体" panose="02010600030101010101" pitchFamily="2" charset="-122"/>
-                      </a:rPr>
-                      <m:t>𝑙𝑜𝑠𝑠</m:t>
-                    </m:r>
-                    <m:r>
-                      <a:rPr lang="en-US" altLang="zh-CN" sz="1800" i="1" kern="100">
-                        <a:solidFill>
-                          <a:srgbClr val="000000"/>
-                        </a:solidFill>
-                        <a:effectLst/>
-                        <a:latin typeface="Cambria Math" panose="02040503050406030204" pitchFamily="18" charset="0"/>
-                        <a:ea typeface="宋体" panose="02010600030101010101" pitchFamily="2" charset="-122"/>
-                      </a:rPr>
-                      <m:t>=</m:t>
-                    </m:r>
-                    <m:r>
-                      <a:rPr lang="en-US" altLang="zh-CN" sz="1800" i="1" kern="100">
-                        <a:solidFill>
-                          <a:srgbClr val="000000"/>
-                        </a:solidFill>
-                        <a:effectLst/>
-                        <a:latin typeface="Cambria Math" panose="02040503050406030204" pitchFamily="18" charset="0"/>
-                        <a:ea typeface="宋体" panose="02010600030101010101" pitchFamily="2" charset="-122"/>
-                      </a:rPr>
-                      <m:t>𝛼</m:t>
-                    </m:r>
-                    <m:sSub>
-                      <m:sSubPr>
-                        <m:ctrlPr>
-                          <a:rPr lang="zh-CN" altLang="zh-CN" sz="1800" i="1" kern="100">
-                            <a:solidFill>
-                              <a:srgbClr val="000000"/>
-                            </a:solidFill>
-                            <a:effectLst/>
-                            <a:latin typeface="Cambria Math" panose="02040503050406030204" pitchFamily="18" charset="0"/>
-                            <a:ea typeface="Cambria Math" panose="02040503050406030204" pitchFamily="18" charset="0"/>
-                          </a:rPr>
-                        </m:ctrlPr>
-                      </m:sSubPr>
-                      <m:e>
-                        <m:r>
-                          <a:rPr lang="en-US" altLang="zh-CN" sz="1800" i="1" kern="100">
-                            <a:solidFill>
-                              <a:srgbClr val="000000"/>
-                            </a:solidFill>
-                            <a:effectLst/>
-                            <a:latin typeface="Cambria Math" panose="02040503050406030204" pitchFamily="18" charset="0"/>
-                            <a:ea typeface="宋体" panose="02010600030101010101" pitchFamily="2" charset="-122"/>
-                          </a:rPr>
-                          <m:t>𝐿</m:t>
-                        </m:r>
-                      </m:e>
-                      <m:sub>
-                        <m:r>
-                          <a:rPr lang="en-US" altLang="zh-CN" sz="1800" i="1" kern="100">
-                            <a:solidFill>
-                              <a:srgbClr val="000000"/>
-                            </a:solidFill>
-                            <a:effectLst/>
-                            <a:latin typeface="Cambria Math" panose="02040503050406030204" pitchFamily="18" charset="0"/>
-                            <a:ea typeface="宋体" panose="02010600030101010101" pitchFamily="2" charset="-122"/>
-                          </a:rPr>
-                          <m:t>𝐷𝐸</m:t>
-                        </m:r>
-                      </m:sub>
-                    </m:sSub>
-                    <m:r>
-                      <a:rPr lang="en-US" altLang="zh-CN" sz="1800" i="1" kern="100">
-                        <a:solidFill>
-                          <a:srgbClr val="000000"/>
-                        </a:solidFill>
-                        <a:effectLst/>
-                        <a:latin typeface="Cambria Math" panose="02040503050406030204" pitchFamily="18" charset="0"/>
-                        <a:ea typeface="宋体" panose="02010600030101010101" pitchFamily="2" charset="-122"/>
-                      </a:rPr>
-                      <m:t>+(1−</m:t>
-                    </m:r>
-                    <m:r>
-                      <a:rPr lang="en-US" altLang="zh-CN" sz="1800" i="1" kern="100">
-                        <a:solidFill>
-                          <a:srgbClr val="000000"/>
-                        </a:solidFill>
-                        <a:effectLst/>
-                        <a:latin typeface="Cambria Math" panose="02040503050406030204" pitchFamily="18" charset="0"/>
-                        <a:ea typeface="宋体" panose="02010600030101010101" pitchFamily="2" charset="-122"/>
-                      </a:rPr>
-                      <m:t>𝛼</m:t>
-                    </m:r>
-                    <m:r>
-                      <a:rPr lang="en-US" altLang="zh-CN" sz="1800" i="1" kern="100">
-                        <a:solidFill>
-                          <a:srgbClr val="000000"/>
-                        </a:solidFill>
-                        <a:effectLst/>
-                        <a:latin typeface="Cambria Math" panose="02040503050406030204" pitchFamily="18" charset="0"/>
-                        <a:ea typeface="宋体" panose="02010600030101010101" pitchFamily="2" charset="-122"/>
-                      </a:rPr>
-                      <m:t>)</m:t>
-                    </m:r>
-                    <m:sSub>
-                      <m:sSubPr>
-                        <m:ctrlPr>
-                          <a:rPr lang="zh-CN" altLang="zh-CN" sz="1800" i="1" kern="100">
-                            <a:solidFill>
-                              <a:srgbClr val="000000"/>
-                            </a:solidFill>
-                            <a:effectLst/>
-                            <a:latin typeface="Cambria Math" panose="02040503050406030204" pitchFamily="18" charset="0"/>
-                            <a:ea typeface="Cambria Math" panose="02040503050406030204" pitchFamily="18" charset="0"/>
-                          </a:rPr>
-                        </m:ctrlPr>
-                      </m:sSubPr>
-                      <m:e>
-                        <m:r>
-                          <a:rPr lang="en-US" altLang="zh-CN" sz="1800" i="1" kern="100">
-                            <a:solidFill>
-                              <a:srgbClr val="000000"/>
-                            </a:solidFill>
-                            <a:effectLst/>
-                            <a:latin typeface="Cambria Math" panose="02040503050406030204" pitchFamily="18" charset="0"/>
-                            <a:ea typeface="宋体" panose="02010600030101010101" pitchFamily="2" charset="-122"/>
-                          </a:rPr>
-                          <m:t>𝐿</m:t>
-                        </m:r>
-                      </m:e>
-                      <m:sub>
-                        <m:r>
-                          <a:rPr lang="en-US" altLang="zh-CN" sz="1800" i="1" kern="100">
-                            <a:solidFill>
-                              <a:srgbClr val="000000"/>
-                            </a:solidFill>
-                            <a:effectLst/>
-                            <a:latin typeface="Cambria Math" panose="02040503050406030204" pitchFamily="18" charset="0"/>
-                            <a:ea typeface="宋体" panose="02010600030101010101" pitchFamily="2" charset="-122"/>
-                          </a:rPr>
-                          <m:t>𝐶𝐸</m:t>
-                        </m:r>
-                      </m:sub>
-                    </m:sSub>
-                  </m:oMath>
-                </a14:m>
-                <a:r>
-                  <a:rPr lang="zh-CN" altLang="zh-CN" sz="1800" kern="100" dirty="0">
-                    <a:solidFill>
-                      <a:srgbClr val="000000"/>
-                    </a:solidFill>
-                    <a:effectLst/>
-                    <a:latin typeface="Times New Roman" panose="02020603050405020304" pitchFamily="18" charset="0"/>
-                    <a:ea typeface="宋体" panose="02010600030101010101" pitchFamily="2" charset="-122"/>
-                  </a:rPr>
-                  <a:t>损失函数来对模型进行训练。通过引入不同权重</a:t>
-                </a:r>
-                <a:r>
-                  <a:rPr lang="en-US" altLang="zh-CN" sz="1800" kern="100" dirty="0">
-                    <a:solidFill>
-                      <a:srgbClr val="000000"/>
-                    </a:solidFill>
-                    <a:effectLst/>
-                    <a:latin typeface="Times New Roman" panose="02020603050405020304" pitchFamily="18" charset="0"/>
-                    <a:ea typeface="宋体" panose="02010600030101010101" pitchFamily="2" charset="-122"/>
-                  </a:rPr>
-                  <a:t>α</a:t>
-                </a:r>
-                <a:r>
-                  <a:rPr lang="zh-CN" altLang="zh-CN" sz="1800" kern="100" dirty="0">
-                    <a:solidFill>
-                      <a:srgbClr val="000000"/>
-                    </a:solidFill>
-                    <a:effectLst/>
-                    <a:latin typeface="Times New Roman" panose="02020603050405020304" pitchFamily="18" charset="0"/>
-                    <a:ea typeface="宋体" panose="02010600030101010101" pitchFamily="2" charset="-122"/>
-                  </a:rPr>
-                  <a:t>值来比较在不同权重</a:t>
-                </a:r>
-                <a:r>
-                  <a:rPr lang="en-US" altLang="zh-CN" sz="1800" kern="100" dirty="0">
-                    <a:solidFill>
-                      <a:srgbClr val="000000"/>
-                    </a:solidFill>
-                    <a:effectLst/>
-                    <a:latin typeface="Times New Roman" panose="02020603050405020304" pitchFamily="18" charset="0"/>
-                    <a:ea typeface="宋体" panose="02010600030101010101" pitchFamily="2" charset="-122"/>
-                  </a:rPr>
-                  <a:t>Dice Loss</a:t>
-                </a:r>
-                <a:r>
-                  <a:rPr lang="zh-CN" altLang="zh-CN" sz="1800" kern="100" dirty="0">
-                    <a:solidFill>
-                      <a:srgbClr val="000000"/>
-                    </a:solidFill>
-                    <a:effectLst/>
-                    <a:latin typeface="Times New Roman" panose="02020603050405020304" pitchFamily="18" charset="0"/>
-                    <a:ea typeface="宋体" panose="02010600030101010101" pitchFamily="2" charset="-122"/>
-                  </a:rPr>
-                  <a:t>下损失函数对模型的效果，为保证数据的有效性，本节在每种权重上进行</a:t>
-                </a:r>
-                <a:r>
-                  <a:rPr lang="en-US" altLang="zh-CN" sz="1800" kern="100" dirty="0">
-                    <a:solidFill>
-                      <a:srgbClr val="000000"/>
-                    </a:solidFill>
-                    <a:effectLst/>
-                    <a:latin typeface="Times New Roman" panose="02020603050405020304" pitchFamily="18" charset="0"/>
-                    <a:ea typeface="宋体" panose="02010600030101010101" pitchFamily="2" charset="-122"/>
-                  </a:rPr>
-                  <a:t>5</a:t>
-                </a:r>
-                <a:r>
-                  <a:rPr lang="zh-CN" altLang="zh-CN" sz="1800" kern="100" dirty="0">
-                    <a:solidFill>
-                      <a:srgbClr val="000000"/>
-                    </a:solidFill>
-                    <a:effectLst/>
-                    <a:latin typeface="Times New Roman" panose="02020603050405020304" pitchFamily="18" charset="0"/>
-                    <a:ea typeface="宋体" panose="02010600030101010101" pitchFamily="2" charset="-122"/>
-                  </a:rPr>
-                  <a:t>次实验然后取平均值。</a:t>
-                </a:r>
-                <a:endParaRPr lang="zh-CN" altLang="zh-CN" sz="1800" kern="100" dirty="0">
-                  <a:effectLst/>
-                  <a:latin typeface="Times New Roman" panose="02020603050405020304" pitchFamily="18" charset="0"/>
-                  <a:ea typeface="宋体" panose="02010600030101010101" pitchFamily="2" charset="-122"/>
-                </a:endParaRPr>
-              </a:p>
-              <a:p>
-                <a:pPr indent="304800" algn="just">
-                  <a:lnSpc>
-                    <a:spcPct val="150000"/>
-                  </a:lnSpc>
-                </a:pPr>
-                <a:r>
-                  <a:rPr lang="zh-CN" altLang="zh-CN" sz="1800" kern="100" dirty="0">
-                    <a:solidFill>
-                      <a:srgbClr val="000000"/>
-                    </a:solidFill>
-                    <a:effectLst/>
-                    <a:latin typeface="Times New Roman" panose="02020603050405020304" pitchFamily="18" charset="0"/>
-                    <a:ea typeface="宋体" panose="02010600030101010101" pitchFamily="2" charset="-122"/>
-                  </a:rPr>
-                  <a:t>结果如表所示，当</a:t>
-                </a:r>
-                <a:r>
-                  <a:rPr lang="en-US" altLang="zh-CN" sz="1800" kern="100" dirty="0">
-                    <a:solidFill>
-                      <a:srgbClr val="000000"/>
-                    </a:solidFill>
-                    <a:effectLst/>
-                    <a:latin typeface="Times New Roman" panose="02020603050405020304" pitchFamily="18" charset="0"/>
-                    <a:ea typeface="宋体" panose="02010600030101010101" pitchFamily="2" charset="-122"/>
-                  </a:rPr>
-                  <a:t>α=0.7</a:t>
-                </a:r>
-                <a:r>
-                  <a:rPr lang="zh-CN" altLang="zh-CN" sz="1800" kern="100" dirty="0">
-                    <a:solidFill>
-                      <a:srgbClr val="000000"/>
-                    </a:solidFill>
-                    <a:effectLst/>
-                    <a:latin typeface="Times New Roman" panose="02020603050405020304" pitchFamily="18" charset="0"/>
-                    <a:ea typeface="宋体" panose="02010600030101010101" pitchFamily="2" charset="-122"/>
-                  </a:rPr>
-                  <a:t>时模型的精确率和</a:t>
-                </a:r>
-                <a:r>
-                  <a:rPr lang="en-US" altLang="zh-CN" sz="1800" kern="100" dirty="0">
-                    <a:solidFill>
-                      <a:srgbClr val="000000"/>
-                    </a:solidFill>
-                    <a:effectLst/>
-                    <a:latin typeface="Times New Roman" panose="02020603050405020304" pitchFamily="18" charset="0"/>
-                    <a:ea typeface="宋体" panose="02010600030101010101" pitchFamily="2" charset="-122"/>
-                  </a:rPr>
-                  <a:t>F1</a:t>
-                </a:r>
-                <a:r>
-                  <a:rPr lang="zh-CN" altLang="zh-CN" sz="1800" kern="100" dirty="0">
-                    <a:solidFill>
-                      <a:srgbClr val="000000"/>
-                    </a:solidFill>
-                    <a:effectLst/>
-                    <a:latin typeface="Times New Roman" panose="02020603050405020304" pitchFamily="18" charset="0"/>
-                    <a:ea typeface="宋体" panose="02010600030101010101" pitchFamily="2" charset="-122"/>
-                  </a:rPr>
-                  <a:t>值最高，此时精确率达到</a:t>
-                </a:r>
-                <a:r>
-                  <a:rPr lang="en-US" altLang="zh-CN" sz="1800" kern="100" dirty="0">
-                    <a:solidFill>
-                      <a:srgbClr val="000000"/>
-                    </a:solidFill>
-                    <a:effectLst/>
-                    <a:latin typeface="Times New Roman" panose="02020603050405020304" pitchFamily="18" charset="0"/>
-                    <a:ea typeface="宋体" panose="02010600030101010101" pitchFamily="2" charset="-122"/>
-                  </a:rPr>
-                  <a:t>76.54%</a:t>
-                </a:r>
-                <a:r>
-                  <a:rPr lang="zh-CN" altLang="zh-CN" sz="1800" kern="100" dirty="0">
-                    <a:solidFill>
-                      <a:srgbClr val="000000"/>
-                    </a:solidFill>
-                    <a:effectLst/>
-                    <a:latin typeface="Times New Roman" panose="02020603050405020304" pitchFamily="18" charset="0"/>
-                    <a:ea typeface="宋体" panose="02010600030101010101" pitchFamily="2" charset="-122"/>
-                  </a:rPr>
-                  <a:t>，</a:t>
-                </a:r>
-                <a:r>
-                  <a:rPr lang="en-US" altLang="zh-CN" sz="1800" kern="100" dirty="0">
-                    <a:solidFill>
-                      <a:srgbClr val="000000"/>
-                    </a:solidFill>
-                    <a:effectLst/>
-                    <a:latin typeface="Times New Roman" panose="02020603050405020304" pitchFamily="18" charset="0"/>
-                    <a:ea typeface="宋体" panose="02010600030101010101" pitchFamily="2" charset="-122"/>
-                  </a:rPr>
-                  <a:t>F1</a:t>
-                </a:r>
-                <a:r>
-                  <a:rPr lang="zh-CN" altLang="zh-CN" sz="1800" kern="100" dirty="0">
-                    <a:solidFill>
-                      <a:srgbClr val="000000"/>
-                    </a:solidFill>
-                    <a:effectLst/>
-                    <a:latin typeface="Times New Roman" panose="02020603050405020304" pitchFamily="18" charset="0"/>
-                    <a:ea typeface="宋体" panose="02010600030101010101" pitchFamily="2" charset="-122"/>
-                  </a:rPr>
-                  <a:t>值达到了</a:t>
-                </a:r>
-                <a:r>
-                  <a:rPr lang="en-US" altLang="zh-CN" sz="1800" kern="100" dirty="0">
-                    <a:solidFill>
-                      <a:srgbClr val="000000"/>
-                    </a:solidFill>
-                    <a:effectLst/>
-                    <a:latin typeface="Times New Roman" panose="02020603050405020304" pitchFamily="18" charset="0"/>
-                    <a:ea typeface="宋体" panose="02010600030101010101" pitchFamily="2" charset="-122"/>
-                  </a:rPr>
-                  <a:t>72.68%</a:t>
-                </a:r>
-                <a:r>
-                  <a:rPr lang="zh-CN" altLang="zh-CN" sz="1800" kern="100" dirty="0">
-                    <a:solidFill>
-                      <a:srgbClr val="000000"/>
-                    </a:solidFill>
-                    <a:effectLst/>
-                    <a:latin typeface="Times New Roman" panose="02020603050405020304" pitchFamily="18" charset="0"/>
-                    <a:ea typeface="宋体" panose="02010600030101010101" pitchFamily="2" charset="-122"/>
-                  </a:rPr>
-                  <a:t>，这说明我们联合使用</a:t>
-                </a:r>
-                <a:r>
-                  <a:rPr lang="en-US" altLang="zh-CN" sz="1800" kern="100" dirty="0">
-                    <a:solidFill>
-                      <a:srgbClr val="000000"/>
-                    </a:solidFill>
-                    <a:effectLst/>
-                    <a:latin typeface="Times New Roman" panose="02020603050405020304" pitchFamily="18" charset="0"/>
-                    <a:ea typeface="宋体" panose="02010600030101010101" pitchFamily="2" charset="-122"/>
-                  </a:rPr>
-                  <a:t>Dice loss</a:t>
-                </a:r>
-                <a:r>
-                  <a:rPr lang="zh-CN" altLang="zh-CN" sz="1800" kern="100" dirty="0">
-                    <a:solidFill>
-                      <a:srgbClr val="000000"/>
-                    </a:solidFill>
-                    <a:effectLst/>
-                    <a:latin typeface="Times New Roman" panose="02020603050405020304" pitchFamily="18" charset="0"/>
-                    <a:ea typeface="宋体" panose="02010600030101010101" pitchFamily="2" charset="-122"/>
-                  </a:rPr>
-                  <a:t>和交叉熵损失函数既增加了模型的精确率，又减小了数据不平衡对模型的影响，同时还提高了模型的识别效果。</a:t>
-                </a:r>
-                <a:endParaRPr lang="zh-CN" altLang="zh-CN" sz="1800" kern="100" dirty="0">
-                  <a:effectLst/>
-                  <a:latin typeface="Times New Roman" panose="02020603050405020304" pitchFamily="18" charset="0"/>
-                  <a:ea typeface="宋体" panose="02010600030101010101" pitchFamily="2" charset="-122"/>
-                </a:endParaRPr>
-              </a:p>
-            </p:txBody>
-          </p:sp>
-        </mc:Choice>
-        <mc:Fallback>
-          <p:sp>
-            <p:nvSpPr>
-              <p:cNvPr id="10" name="文本框 9">
-                <a:extLst>
-                  <a:ext uri="{FF2B5EF4-FFF2-40B4-BE49-F238E27FC236}">
-                    <a16:creationId xmlns:a16="http://schemas.microsoft.com/office/drawing/2014/main" id="{D99C9967-6999-4DA4-7495-FBB8F9363B91}"/>
-                  </a:ext>
-                </a:extLst>
-              </p:cNvPr>
-              <p:cNvSpPr txBox="1">
-                <a:spLocks noRot="1" noChangeAspect="1" noMove="1" noResize="1" noEditPoints="1" noAdjustHandles="1" noChangeArrowheads="1" noChangeShapeType="1" noTextEdit="1"/>
-              </p:cNvSpPr>
-              <p:nvPr/>
-            </p:nvSpPr>
-            <p:spPr>
-              <a:xfrm>
-                <a:off x="795868" y="2812877"/>
-                <a:ext cx="9863668" cy="2532745"/>
-              </a:xfrm>
-              <a:prstGeom prst="rect">
-                <a:avLst/>
-              </a:prstGeom>
-              <a:blipFill>
-                <a:blip r:embed="rId3"/>
-                <a:stretch>
-                  <a:fillRect l="-556" r="-2781" b="-2163"/>
-                </a:stretch>
-              </a:blipFill>
-            </p:spPr>
-            <p:txBody>
-              <a:bodyPr/>
-              <a:lstStyle/>
-              <a:p>
-                <a:r>
-                  <a:rPr lang="zh-CN" altLang="en-US">
-                    <a:noFill/>
-                  </a:rPr>
-                  <a:t> </a:t>
-                </a:r>
-              </a:p>
-            </p:txBody>
-          </p:sp>
-        </mc:Fallback>
-      </mc:AlternateContent>
       <p:sp>
         <p:nvSpPr>
           <p:cNvPr id="11" name="TextBox 10"/>
@@ -19926,6 +17484,7 @@
                 <a:spcPts val="600"/>
               </a:spcAft>
             </a:pPr>
+            <a:endParaRPr/>
           </a:p>
         </p:txBody>
       </p:sp>
